--- a/assets/figures-editable/c1-c2/c1-e26.pptx
+++ b/assets/figures-editable/c1-c2/c1-e26.pptx
@@ -7,7 +7,7 @@
   <p:sldIdLst>
     <p:sldId id="256" r:id="rId7"/>
   </p:sldIdLst>
-  <p:sldSz cx="11948160" cy="7924799" type="screen4x3"/>
+  <p:sldSz cx="12191695" cy="6858000" type="screen4x3"/>
   <p:notesSz cx="6858000" cy="9144000"/>
   <p:defaultTextStyle>
     <a:defPPr>
@@ -3098,14 +3098,14 @@
       <p:grpSpPr/>
       <p:sp>
         <p:nvSpPr>
-          <p:cNvPr id="2" name="text1" descr="sci-ppt:C1-E26-001"/>
+          <p:cNvPr id="2" name="C1-E26 text 0" descr="sci-ppt:o000"/>
           <p:cNvSpPr txBox="1"/>
           <p:nvPr/>
         </p:nvSpPr>
         <p:spPr>
           <a:xfrm>
-            <a:off x="316992" y="268224"/>
-            <a:ext cx="11277600" cy="359054"/>
+            <a:off x="274320" y="118872"/>
+            <a:ext cx="11612880" cy="340105"/>
           </a:xfrm>
           <a:prstGeom prst="rect">
             <a:avLst/>
@@ -3114,7 +3114,7 @@
           <a:effectLst/>
         </p:spPr>
         <p:txBody>
-          <a:bodyPr wrap="none" lIns="27432" rIns="27432" tIns="18288" bIns="18288" anchor="ctr">
+          <a:bodyPr wrap="none" lIns="18288" rIns="18288" tIns="18288" bIns="18288" anchor="t">
             <a:spAutoFit/>
           </a:bodyPr>
           <a:lstStyle/>
@@ -3125,37 +3125,37 @@
               </a:spcAft>
             </a:pPr>
             <a:r>
-              <a:rPr sz="1823" b="0" i="0">
+              <a:rPr sz="1900" b="1" i="0">
                 <a:solidFill>
                   <a:srgbClr val="8EDBD4"/>
                 </a:solidFill>
                 <a:latin typeface="Arial"/>
               </a:rPr>
-              <a:t>C1-E26 | Physical-variable diagram</a:t>
-            </a:r>
-          </a:p>
-        </p:txBody>
-      </p:sp>
-      <p:sp>
-        <p:nvSpPr>
-          <p:cNvPr id="3" name="ellipse2" descr="sci-ppt:C1-E26-002"/>
+              <a:t>C1-E26 · Geometry definition and exact symmetry identity</a:t>
+            </a:r>
+          </a:p>
+        </p:txBody>
+      </p:sp>
+      <p:sp>
+        <p:nvSpPr>
+          <p:cNvPr id="3" name="C1-E26 round_rect 1" descr="sci-ppt:o001"/>
           <p:cNvSpPr/>
           <p:nvPr/>
         </p:nvSpPr>
         <p:spPr>
           <a:xfrm>
-            <a:off x="2072640" y="1402080"/>
-            <a:ext cx="2438400" cy="2438400"/>
-          </a:xfrm>
-          <a:prstGeom prst="ellipse">
+            <a:off x="365760" y="914400"/>
+            <a:ext cx="4023360" cy="4937760"/>
+          </a:xfrm>
+          <a:prstGeom prst="roundRect">
             <a:avLst/>
           </a:prstGeom>
           <a:solidFill>
             <a:srgbClr val="213E4B"/>
           </a:solidFill>
-          <a:ln w="21590">
-            <a:solidFill>
-              <a:srgbClr val="B4C7D2"/>
+          <a:ln w="20320">
+            <a:solidFill>
+              <a:srgbClr val="8EDBD4"/>
             </a:solidFill>
           </a:ln>
           <a:effectLst/>
@@ -3168,40 +3168,16 @@
           </a:p>
         </p:txBody>
       </p:sp>
-      <p:cxnSp>
-        <p:nvCxnSpPr>
-          <p:cNvPr id="4" name="arrow3" descr="sci-ppt:C1-E26-003"/>
-          <p:cNvCxnSpPr/>
-          <p:nvPr/>
-        </p:nvCxnSpPr>
-        <p:spPr>
-          <a:xfrm>
-            <a:off x="3291840" y="2621280"/>
-            <a:ext cx="1219200" cy="0"/>
-          </a:xfrm>
-          <a:prstGeom prst="line">
-            <a:avLst/>
-          </a:prstGeom>
-          <a:ln w="25400">
-            <a:solidFill>
-              <a:srgbClr val="8EDBD4"/>
-            </a:solidFill>
-            <a:headEnd type="none" w="med" len="med"/>
-            <a:tailEnd type="triangle" w="med" len="med"/>
-          </a:ln>
-          <a:effectLst/>
-        </p:spPr>
-      </p:cxnSp>
-      <p:sp>
-        <p:nvSpPr>
-          <p:cNvPr id="5" name="text4" descr="sci-ppt:C1-E26-004"/>
+      <p:sp>
+        <p:nvSpPr>
+          <p:cNvPr id="4" name="C1-E26 text 2" descr="sci-ppt:o002"/>
           <p:cNvSpPr txBox="1"/>
           <p:nvPr/>
         </p:nvSpPr>
         <p:spPr>
           <a:xfrm>
-            <a:off x="3474720" y="2133600"/>
-            <a:ext cx="1584960" cy="396849"/>
+            <a:off x="475488" y="969264"/>
+            <a:ext cx="3803904" cy="254889"/>
           </a:xfrm>
           <a:prstGeom prst="rect">
             <a:avLst/>
@@ -3210,7 +3186,7 @@
           <a:effectLst/>
         </p:spPr>
         <p:txBody>
-          <a:bodyPr wrap="none" lIns="27432" rIns="27432" tIns="18288" bIns="18288" anchor="ctr">
+          <a:bodyPr wrap="none" lIns="18288" rIns="18288" tIns="18288" bIns="18288" anchor="t">
             <a:spAutoFit/>
           </a:bodyPr>
           <a:lstStyle/>
@@ -3221,39 +3197,375 @@
               </a:spcAft>
             </a:pPr>
             <a:r>
-              <a:rPr sz="2016" b="0" i="0">
+              <a:rPr sz="1350" b="1" i="0">
+                <a:solidFill>
+                  <a:srgbClr val="8EDBD4"/>
+                </a:solidFill>
+                <a:latin typeface="Arial"/>
+              </a:rPr>
+              <a:t>Perfect symmetry picks no direction</a:t>
+            </a:r>
+          </a:p>
+        </p:txBody>
+      </p:sp>
+      <p:sp>
+        <p:nvSpPr>
+          <p:cNvPr id="5" name="C1-E26 ellipse 3" descr="sci-ppt:o003"/>
+          <p:cNvSpPr/>
+          <p:nvPr/>
+        </p:nvSpPr>
+        <p:spPr>
+          <a:xfrm>
+            <a:off x="1554480" y="2560320"/>
+            <a:ext cx="1645920" cy="1645920"/>
+          </a:xfrm>
+          <a:prstGeom prst="ellipse">
+            <a:avLst/>
+          </a:prstGeom>
+          <a:solidFill>
+            <a:srgbClr val="0C1820"/>
+          </a:solidFill>
+          <a:ln w="27940">
+            <a:solidFill>
+              <a:srgbClr val="F2B880"/>
+            </a:solidFill>
+          </a:ln>
+          <a:effectLst/>
+        </p:spPr>
+        <p:txBody>
+          <a:bodyPr rtlCol="0" anchor="ctr"/>
+          <a:lstStyle/>
+          <a:p>
+            <a:pPr algn="ctr"/>
+          </a:p>
+        </p:txBody>
+      </p:sp>
+      <p:cxnSp>
+        <p:nvCxnSpPr>
+          <p:cNvPr id="6" name="C1-E26 arrow 4" descr="sci-ppt:o004"/>
+          <p:cNvCxnSpPr/>
+          <p:nvPr/>
+        </p:nvCxnSpPr>
+        <p:spPr>
+          <a:xfrm>
+            <a:off x="3246120" y="3383280"/>
+            <a:ext cx="548640" cy="0"/>
+          </a:xfrm>
+          <a:prstGeom prst="line">
+            <a:avLst/>
+          </a:prstGeom>
+          <a:ln w="30480">
+            <a:solidFill>
+              <a:srgbClr val="8EDBD4"/>
+            </a:solidFill>
+            <a:headEnd type="none" w="med" len="med"/>
+            <a:tailEnd type="triangle" w="med" len="med"/>
+          </a:ln>
+          <a:effectLst/>
+        </p:spPr>
+      </p:cxnSp>
+      <p:cxnSp>
+        <p:nvCxnSpPr>
+          <p:cNvPr id="7" name="C1-E26 arrow 5" descr="sci-ppt:o005"/>
+          <p:cNvCxnSpPr/>
+          <p:nvPr/>
+        </p:nvCxnSpPr>
+        <p:spPr>
+          <a:xfrm flipV="1">
+            <a:off x="3129738" y="2674620"/>
+            <a:ext cx="475137" cy="274320"/>
+          </a:xfrm>
+          <a:prstGeom prst="line">
+            <a:avLst/>
+          </a:prstGeom>
+          <a:ln w="30480">
+            <a:solidFill>
+              <a:srgbClr val="8EDBD4"/>
+            </a:solidFill>
+            <a:headEnd type="none" w="med" len="med"/>
+            <a:tailEnd type="triangle" w="med" len="med"/>
+          </a:ln>
+          <a:effectLst/>
+        </p:spPr>
+      </p:cxnSp>
+      <p:cxnSp>
+        <p:nvCxnSpPr>
+          <p:cNvPr id="8" name="C1-E26 arrow 6" descr="sci-ppt:o006"/>
+          <p:cNvCxnSpPr/>
+          <p:nvPr/>
+        </p:nvCxnSpPr>
+        <p:spPr>
+          <a:xfrm flipV="1">
+            <a:off x="2811780" y="2155844"/>
+            <a:ext cx="274320" cy="475137"/>
+          </a:xfrm>
+          <a:prstGeom prst="line">
+            <a:avLst/>
+          </a:prstGeom>
+          <a:ln w="30480">
+            <a:solidFill>
+              <a:srgbClr val="8EDBD4"/>
+            </a:solidFill>
+            <a:headEnd type="none" w="med" len="med"/>
+            <a:tailEnd type="triangle" w="med" len="med"/>
+          </a:ln>
+          <a:effectLst/>
+        </p:spPr>
+      </p:cxnSp>
+      <p:cxnSp>
+        <p:nvCxnSpPr>
+          <p:cNvPr id="9" name="C1-E26 arrow 7" descr="sci-ppt:o007"/>
+          <p:cNvCxnSpPr/>
+          <p:nvPr/>
+        </p:nvCxnSpPr>
+        <p:spPr>
+          <a:xfrm flipV="1">
+            <a:off x="2377440" y="1965960"/>
+            <a:ext cx="0" cy="548640"/>
+          </a:xfrm>
+          <a:prstGeom prst="line">
+            <a:avLst/>
+          </a:prstGeom>
+          <a:ln w="30480">
+            <a:solidFill>
+              <a:srgbClr val="8EDBD4"/>
+            </a:solidFill>
+            <a:headEnd type="none" w="med" len="med"/>
+            <a:tailEnd type="triangle" w="med" len="med"/>
+          </a:ln>
+          <a:effectLst/>
+        </p:spPr>
+      </p:cxnSp>
+      <p:cxnSp>
+        <p:nvCxnSpPr>
+          <p:cNvPr id="10" name="C1-E26 arrow 8" descr="sci-ppt:o008"/>
+          <p:cNvCxnSpPr/>
+          <p:nvPr/>
+        </p:nvCxnSpPr>
+        <p:spPr>
+          <a:xfrm flipH="1" flipV="1">
+            <a:off x="1668780" y="2155844"/>
+            <a:ext cx="274320" cy="475137"/>
+          </a:xfrm>
+          <a:prstGeom prst="line">
+            <a:avLst/>
+          </a:prstGeom>
+          <a:ln w="30480">
+            <a:solidFill>
+              <a:srgbClr val="8EDBD4"/>
+            </a:solidFill>
+            <a:headEnd type="none" w="med" len="med"/>
+            <a:tailEnd type="triangle" w="med" len="med"/>
+          </a:ln>
+          <a:effectLst/>
+        </p:spPr>
+      </p:cxnSp>
+      <p:cxnSp>
+        <p:nvCxnSpPr>
+          <p:cNvPr id="11" name="C1-E26 arrow 9" descr="sci-ppt:o009"/>
+          <p:cNvCxnSpPr/>
+          <p:nvPr/>
+        </p:nvCxnSpPr>
+        <p:spPr>
+          <a:xfrm flipH="1" flipV="1">
+            <a:off x="1150004" y="2674620"/>
+            <a:ext cx="475137" cy="274320"/>
+          </a:xfrm>
+          <a:prstGeom prst="line">
+            <a:avLst/>
+          </a:prstGeom>
+          <a:ln w="30480">
+            <a:solidFill>
+              <a:srgbClr val="8EDBD4"/>
+            </a:solidFill>
+            <a:headEnd type="none" w="med" len="med"/>
+            <a:tailEnd type="triangle" w="med" len="med"/>
+          </a:ln>
+          <a:effectLst/>
+        </p:spPr>
+      </p:cxnSp>
+      <p:cxnSp>
+        <p:nvCxnSpPr>
+          <p:cNvPr id="12" name="C1-E26 arrow 10" descr="sci-ppt:o010"/>
+          <p:cNvCxnSpPr/>
+          <p:nvPr/>
+        </p:nvCxnSpPr>
+        <p:spPr>
+          <a:xfrm flipH="1">
+            <a:off x="960120" y="3383280"/>
+            <a:ext cx="548640" cy="0"/>
+          </a:xfrm>
+          <a:prstGeom prst="line">
+            <a:avLst/>
+          </a:prstGeom>
+          <a:ln w="30480">
+            <a:solidFill>
+              <a:srgbClr val="8EDBD4"/>
+            </a:solidFill>
+            <a:headEnd type="none" w="med" len="med"/>
+            <a:tailEnd type="triangle" w="med" len="med"/>
+          </a:ln>
+          <a:effectLst/>
+        </p:spPr>
+      </p:cxnSp>
+      <p:cxnSp>
+        <p:nvCxnSpPr>
+          <p:cNvPr id="13" name="C1-E26 arrow 11" descr="sci-ppt:o011"/>
+          <p:cNvCxnSpPr/>
+          <p:nvPr/>
+        </p:nvCxnSpPr>
+        <p:spPr>
+          <a:xfrm flipH="1">
+            <a:off x="1150004" y="3817620"/>
+            <a:ext cx="475137" cy="274319"/>
+          </a:xfrm>
+          <a:prstGeom prst="line">
+            <a:avLst/>
+          </a:prstGeom>
+          <a:ln w="30480">
+            <a:solidFill>
+              <a:srgbClr val="8EDBD4"/>
+            </a:solidFill>
+            <a:headEnd type="none" w="med" len="med"/>
+            <a:tailEnd type="triangle" w="med" len="med"/>
+          </a:ln>
+          <a:effectLst/>
+        </p:spPr>
+      </p:cxnSp>
+      <p:cxnSp>
+        <p:nvCxnSpPr>
+          <p:cNvPr id="14" name="C1-E26 arrow 12" descr="sci-ppt:o012"/>
+          <p:cNvCxnSpPr/>
+          <p:nvPr/>
+        </p:nvCxnSpPr>
+        <p:spPr>
+          <a:xfrm flipH="1">
+            <a:off x="1668779" y="4135578"/>
+            <a:ext cx="274320" cy="475137"/>
+          </a:xfrm>
+          <a:prstGeom prst="line">
+            <a:avLst/>
+          </a:prstGeom>
+          <a:ln w="30480">
+            <a:solidFill>
+              <a:srgbClr val="8EDBD4"/>
+            </a:solidFill>
+            <a:headEnd type="none" w="med" len="med"/>
+            <a:tailEnd type="triangle" w="med" len="med"/>
+          </a:ln>
+          <a:effectLst/>
+        </p:spPr>
+      </p:cxnSp>
+      <p:cxnSp>
+        <p:nvCxnSpPr>
+          <p:cNvPr id="15" name="C1-E26 arrow 13" descr="sci-ppt:o013"/>
+          <p:cNvCxnSpPr/>
+          <p:nvPr/>
+        </p:nvCxnSpPr>
+        <p:spPr>
+          <a:xfrm flipH="1">
+            <a:off x="2377439" y="4251960"/>
+            <a:ext cx="1" cy="548640"/>
+          </a:xfrm>
+          <a:prstGeom prst="line">
+            <a:avLst/>
+          </a:prstGeom>
+          <a:ln w="30480">
+            <a:solidFill>
+              <a:srgbClr val="8EDBD4"/>
+            </a:solidFill>
+            <a:headEnd type="none" w="med" len="med"/>
+            <a:tailEnd type="triangle" w="med" len="med"/>
+          </a:ln>
+          <a:effectLst/>
+        </p:spPr>
+      </p:cxnSp>
+      <p:cxnSp>
+        <p:nvCxnSpPr>
+          <p:cNvPr id="16" name="C1-E26 arrow 14" descr="sci-ppt:o014"/>
+          <p:cNvCxnSpPr/>
+          <p:nvPr/>
+        </p:nvCxnSpPr>
+        <p:spPr>
+          <a:xfrm>
+            <a:off x="2811780" y="4135578"/>
+            <a:ext cx="274320" cy="475137"/>
+          </a:xfrm>
+          <a:prstGeom prst="line">
+            <a:avLst/>
+          </a:prstGeom>
+          <a:ln w="30480">
+            <a:solidFill>
+              <a:srgbClr val="8EDBD4"/>
+            </a:solidFill>
+            <a:headEnd type="none" w="med" len="med"/>
+            <a:tailEnd type="triangle" w="med" len="med"/>
+          </a:ln>
+          <a:effectLst/>
+        </p:spPr>
+      </p:cxnSp>
+      <p:cxnSp>
+        <p:nvCxnSpPr>
+          <p:cNvPr id="17" name="C1-E26 arrow 15" descr="sci-ppt:o015"/>
+          <p:cNvCxnSpPr/>
+          <p:nvPr/>
+        </p:nvCxnSpPr>
+        <p:spPr>
+          <a:xfrm>
+            <a:off x="3129738" y="3817620"/>
+            <a:ext cx="475137" cy="274320"/>
+          </a:xfrm>
+          <a:prstGeom prst="line">
+            <a:avLst/>
+          </a:prstGeom>
+          <a:ln w="30480">
+            <a:solidFill>
+              <a:srgbClr val="8EDBD4"/>
+            </a:solidFill>
+            <a:headEnd type="none" w="med" len="med"/>
+            <a:tailEnd type="triangle" w="med" len="med"/>
+          </a:ln>
+          <a:effectLst/>
+        </p:spPr>
+      </p:cxnSp>
+      <p:sp>
+        <p:nvSpPr>
+          <p:cNvPr id="18" name="C1-E26 text 16" descr="sci-ppt:o016"/>
+          <p:cNvSpPr txBox="1"/>
+          <p:nvPr/>
+        </p:nvSpPr>
+        <p:spPr>
+          <a:xfrm>
+            <a:off x="502920" y="5029200"/>
+            <a:ext cx="3749039" cy="626745"/>
+          </a:xfrm>
+          <a:prstGeom prst="rect">
+            <a:avLst/>
+          </a:prstGeom>
+          <a:noFill/>
+          <a:effectLst/>
+        </p:spPr>
+        <p:txBody>
+          <a:bodyPr wrap="none" lIns="18288" rIns="18288" tIns="18288" bIns="18288" anchor="t">
+            <a:spAutoFit/>
+          </a:bodyPr>
+          <a:lstStyle/>
+          <a:p>
+            <a:pPr algn="l">
+              <a:spcAft>
+                <a:spcPts val="0"/>
+              </a:spcAft>
+            </a:pPr>
+            <a:r>
+              <a:rPr sz="1250" b="0" i="0">
                 <a:solidFill>
                   <a:srgbClr val="E7F0F3"/>
                 </a:solidFill>
                 <a:latin typeface="Arial"/>
               </a:rPr>
-              <a:t>R(t)</a:t>
-            </a:r>
-          </a:p>
-        </p:txBody>
-      </p:sp>
-      <p:sp>
-        <p:nvSpPr>
-          <p:cNvPr id="6" name="text5" descr="sci-ppt:C1-E26-005"/>
-          <p:cNvSpPr txBox="1"/>
-          <p:nvPr/>
-        </p:nvSpPr>
-        <p:spPr>
-          <a:xfrm>
-            <a:off x="2682240" y="2804160"/>
-            <a:ext cx="2194560" cy="377952"/>
-          </a:xfrm>
-          <a:prstGeom prst="rect">
-            <a:avLst/>
-          </a:prstGeom>
-          <a:noFill/>
-          <a:effectLst/>
-        </p:spPr>
-        <p:txBody>
-          <a:bodyPr wrap="none" lIns="27432" rIns="27432" tIns="18288" bIns="18288" anchor="ctr">
-            <a:spAutoFit/>
-          </a:bodyPr>
-          <a:lstStyle/>
+              <a:t>∮ eᵣ dΩ = 0: outward unit vectors cancel in</a:t>
+            </a:r>
+          </a:p>
           <a:p>
             <a:pPr algn="l">
               <a:spcAft>
@@ -3261,39 +3573,15 @@
               </a:spcAft>
             </a:pPr>
             <a:r>
-              <a:rPr sz="1920" b="0" i="0">
+              <a:rPr sz="1250" b="0" i="0">
                 <a:solidFill>
                   <a:srgbClr val="E7F0F3"/>
                 </a:solidFill>
                 <a:latin typeface="Arial"/>
               </a:rPr>
-              <a:t>p_b</a:t>
-            </a:r>
-          </a:p>
-        </p:txBody>
-      </p:sp>
-      <p:sp>
-        <p:nvSpPr>
-          <p:cNvPr id="7" name="text6" descr="sci-ppt:C1-E26-006"/>
-          <p:cNvSpPr txBox="1"/>
-          <p:nvPr/>
-        </p:nvSpPr>
-        <p:spPr>
-          <a:xfrm>
-            <a:off x="5242560" y="1524000"/>
-            <a:ext cx="4876800" cy="415747"/>
-          </a:xfrm>
-          <a:prstGeom prst="rect">
-            <a:avLst/>
-          </a:prstGeom>
-          <a:noFill/>
-          <a:effectLst/>
-        </p:spPr>
-        <p:txBody>
-          <a:bodyPr wrap="none" lIns="27432" rIns="27432" tIns="18288" bIns="18288" anchor="ctr">
-            <a:spAutoFit/>
-          </a:bodyPr>
-          <a:lstStyle/>
+              <a:t>pairs, so a lone sphere has no preferred jet</a:t>
+            </a:r>
+          </a:p>
           <a:p>
             <a:pPr algn="l">
               <a:spcAft>
@@ -3301,27 +3589,719 @@
               </a:spcAft>
             </a:pPr>
             <a:r>
-              <a:rPr sz="2111" b="0" i="0">
+              <a:rPr sz="1250" b="0" i="0">
                 <a:solidFill>
                   <a:srgbClr val="E7F0F3"/>
                 </a:solidFill>
                 <a:latin typeface="Arial"/>
               </a:rPr>
-              <a:t>Surrounding liquid</a:t>
-            </a:r>
-          </a:p>
-        </p:txBody>
-      </p:sp>
-      <p:sp>
-        <p:nvSpPr>
-          <p:cNvPr id="8" name="text7" descr="sci-ppt:C1-E26-007"/>
+              <a:t>direction.</a:t>
+            </a:r>
+          </a:p>
+        </p:txBody>
+      </p:sp>
+      <p:sp>
+        <p:nvSpPr>
+          <p:cNvPr id="19" name="C1-E26 rect 17" descr="sci-ppt:o017"/>
+          <p:cNvSpPr/>
+          <p:nvPr/>
+        </p:nvSpPr>
+        <p:spPr>
+          <a:xfrm>
+            <a:off x="4754880" y="5486400"/>
+            <a:ext cx="7040880" cy="256032"/>
+          </a:xfrm>
+          <a:prstGeom prst="rect">
+            <a:avLst/>
+          </a:prstGeom>
+          <a:solidFill>
+            <a:srgbClr val="3A5362"/>
+          </a:solidFill>
+          <a:ln w="16510">
+            <a:solidFill>
+              <a:srgbClr val="B4C7D2"/>
+            </a:solidFill>
+          </a:ln>
+          <a:effectLst/>
+        </p:spPr>
+        <p:txBody>
+          <a:bodyPr rtlCol="0" anchor="ctr"/>
+          <a:lstStyle/>
+          <a:p>
+            <a:pPr algn="ctr"/>
+          </a:p>
+        </p:txBody>
+      </p:sp>
+      <p:cxnSp>
+        <p:nvCxnSpPr>
+          <p:cNvPr id="20" name="C1-E26 line 18" descr="sci-ppt:o018"/>
+          <p:cNvCxnSpPr/>
+          <p:nvPr/>
+        </p:nvCxnSpPr>
+        <p:spPr>
+          <a:xfrm>
+            <a:off x="4846320" y="5742432"/>
+            <a:ext cx="137160" cy="155448"/>
+          </a:xfrm>
+          <a:prstGeom prst="line">
+            <a:avLst/>
+          </a:prstGeom>
+          <a:ln w="12700">
+            <a:solidFill>
+              <a:srgbClr val="B4C7D2"/>
+            </a:solidFill>
+          </a:ln>
+          <a:effectLst/>
+        </p:spPr>
+      </p:cxnSp>
+      <p:cxnSp>
+        <p:nvCxnSpPr>
+          <p:cNvPr id="21" name="C1-E26 line 19" descr="sci-ppt:o019"/>
+          <p:cNvCxnSpPr/>
+          <p:nvPr/>
+        </p:nvCxnSpPr>
+        <p:spPr>
+          <a:xfrm>
+            <a:off x="5074920" y="5742432"/>
+            <a:ext cx="137160" cy="155448"/>
+          </a:xfrm>
+          <a:prstGeom prst="line">
+            <a:avLst/>
+          </a:prstGeom>
+          <a:ln w="12700">
+            <a:solidFill>
+              <a:srgbClr val="B4C7D2"/>
+            </a:solidFill>
+          </a:ln>
+          <a:effectLst/>
+        </p:spPr>
+      </p:cxnSp>
+      <p:cxnSp>
+        <p:nvCxnSpPr>
+          <p:cNvPr id="22" name="C1-E26 line 20" descr="sci-ppt:o020"/>
+          <p:cNvCxnSpPr/>
+          <p:nvPr/>
+        </p:nvCxnSpPr>
+        <p:spPr>
+          <a:xfrm>
+            <a:off x="5303520" y="5742432"/>
+            <a:ext cx="137160" cy="155448"/>
+          </a:xfrm>
+          <a:prstGeom prst="line">
+            <a:avLst/>
+          </a:prstGeom>
+          <a:ln w="12700">
+            <a:solidFill>
+              <a:srgbClr val="B4C7D2"/>
+            </a:solidFill>
+          </a:ln>
+          <a:effectLst/>
+        </p:spPr>
+      </p:cxnSp>
+      <p:cxnSp>
+        <p:nvCxnSpPr>
+          <p:cNvPr id="23" name="C1-E26 line 21" descr="sci-ppt:o021"/>
+          <p:cNvCxnSpPr/>
+          <p:nvPr/>
+        </p:nvCxnSpPr>
+        <p:spPr>
+          <a:xfrm>
+            <a:off x="5532120" y="5742432"/>
+            <a:ext cx="137160" cy="155448"/>
+          </a:xfrm>
+          <a:prstGeom prst="line">
+            <a:avLst/>
+          </a:prstGeom>
+          <a:ln w="12700">
+            <a:solidFill>
+              <a:srgbClr val="B4C7D2"/>
+            </a:solidFill>
+          </a:ln>
+          <a:effectLst/>
+        </p:spPr>
+      </p:cxnSp>
+      <p:cxnSp>
+        <p:nvCxnSpPr>
+          <p:cNvPr id="24" name="C1-E26 line 22" descr="sci-ppt:o022"/>
+          <p:cNvCxnSpPr/>
+          <p:nvPr/>
+        </p:nvCxnSpPr>
+        <p:spPr>
+          <a:xfrm>
+            <a:off x="5760720" y="5742432"/>
+            <a:ext cx="137160" cy="155448"/>
+          </a:xfrm>
+          <a:prstGeom prst="line">
+            <a:avLst/>
+          </a:prstGeom>
+          <a:ln w="12700">
+            <a:solidFill>
+              <a:srgbClr val="B4C7D2"/>
+            </a:solidFill>
+          </a:ln>
+          <a:effectLst/>
+        </p:spPr>
+      </p:cxnSp>
+      <p:cxnSp>
+        <p:nvCxnSpPr>
+          <p:cNvPr id="25" name="C1-E26 line 23" descr="sci-ppt:o023"/>
+          <p:cNvCxnSpPr/>
+          <p:nvPr/>
+        </p:nvCxnSpPr>
+        <p:spPr>
+          <a:xfrm>
+            <a:off x="5989320" y="5742432"/>
+            <a:ext cx="137160" cy="155448"/>
+          </a:xfrm>
+          <a:prstGeom prst="line">
+            <a:avLst/>
+          </a:prstGeom>
+          <a:ln w="12700">
+            <a:solidFill>
+              <a:srgbClr val="B4C7D2"/>
+            </a:solidFill>
+          </a:ln>
+          <a:effectLst/>
+        </p:spPr>
+      </p:cxnSp>
+      <p:cxnSp>
+        <p:nvCxnSpPr>
+          <p:cNvPr id="26" name="C1-E26 line 24" descr="sci-ppt:o024"/>
+          <p:cNvCxnSpPr/>
+          <p:nvPr/>
+        </p:nvCxnSpPr>
+        <p:spPr>
+          <a:xfrm>
+            <a:off x="6217920" y="5742432"/>
+            <a:ext cx="137160" cy="155448"/>
+          </a:xfrm>
+          <a:prstGeom prst="line">
+            <a:avLst/>
+          </a:prstGeom>
+          <a:ln w="12700">
+            <a:solidFill>
+              <a:srgbClr val="B4C7D2"/>
+            </a:solidFill>
+          </a:ln>
+          <a:effectLst/>
+        </p:spPr>
+      </p:cxnSp>
+      <p:cxnSp>
+        <p:nvCxnSpPr>
+          <p:cNvPr id="27" name="C1-E26 line 25" descr="sci-ppt:o025"/>
+          <p:cNvCxnSpPr/>
+          <p:nvPr/>
+        </p:nvCxnSpPr>
+        <p:spPr>
+          <a:xfrm>
+            <a:off x="6446520" y="5742432"/>
+            <a:ext cx="137160" cy="155448"/>
+          </a:xfrm>
+          <a:prstGeom prst="line">
+            <a:avLst/>
+          </a:prstGeom>
+          <a:ln w="12700">
+            <a:solidFill>
+              <a:srgbClr val="B4C7D2"/>
+            </a:solidFill>
+          </a:ln>
+          <a:effectLst/>
+        </p:spPr>
+      </p:cxnSp>
+      <p:cxnSp>
+        <p:nvCxnSpPr>
+          <p:cNvPr id="28" name="C1-E26 line 26" descr="sci-ppt:o026"/>
+          <p:cNvCxnSpPr/>
+          <p:nvPr/>
+        </p:nvCxnSpPr>
+        <p:spPr>
+          <a:xfrm>
+            <a:off x="6675120" y="5742432"/>
+            <a:ext cx="137160" cy="155448"/>
+          </a:xfrm>
+          <a:prstGeom prst="line">
+            <a:avLst/>
+          </a:prstGeom>
+          <a:ln w="12700">
+            <a:solidFill>
+              <a:srgbClr val="B4C7D2"/>
+            </a:solidFill>
+          </a:ln>
+          <a:effectLst/>
+        </p:spPr>
+      </p:cxnSp>
+      <p:cxnSp>
+        <p:nvCxnSpPr>
+          <p:cNvPr id="29" name="C1-E26 line 27" descr="sci-ppt:o027"/>
+          <p:cNvCxnSpPr/>
+          <p:nvPr/>
+        </p:nvCxnSpPr>
+        <p:spPr>
+          <a:xfrm>
+            <a:off x="6903720" y="5742432"/>
+            <a:ext cx="137160" cy="155448"/>
+          </a:xfrm>
+          <a:prstGeom prst="line">
+            <a:avLst/>
+          </a:prstGeom>
+          <a:ln w="12700">
+            <a:solidFill>
+              <a:srgbClr val="B4C7D2"/>
+            </a:solidFill>
+          </a:ln>
+          <a:effectLst/>
+        </p:spPr>
+      </p:cxnSp>
+      <p:cxnSp>
+        <p:nvCxnSpPr>
+          <p:cNvPr id="30" name="C1-E26 line 28" descr="sci-ppt:o028"/>
+          <p:cNvCxnSpPr/>
+          <p:nvPr/>
+        </p:nvCxnSpPr>
+        <p:spPr>
+          <a:xfrm>
+            <a:off x="7132320" y="5742432"/>
+            <a:ext cx="137160" cy="155448"/>
+          </a:xfrm>
+          <a:prstGeom prst="line">
+            <a:avLst/>
+          </a:prstGeom>
+          <a:ln w="12700">
+            <a:solidFill>
+              <a:srgbClr val="B4C7D2"/>
+            </a:solidFill>
+          </a:ln>
+          <a:effectLst/>
+        </p:spPr>
+      </p:cxnSp>
+      <p:cxnSp>
+        <p:nvCxnSpPr>
+          <p:cNvPr id="31" name="C1-E26 line 29" descr="sci-ppt:o029"/>
+          <p:cNvCxnSpPr/>
+          <p:nvPr/>
+        </p:nvCxnSpPr>
+        <p:spPr>
+          <a:xfrm>
+            <a:off x="7360920" y="5742432"/>
+            <a:ext cx="137159" cy="155448"/>
+          </a:xfrm>
+          <a:prstGeom prst="line">
+            <a:avLst/>
+          </a:prstGeom>
+          <a:ln w="12700">
+            <a:solidFill>
+              <a:srgbClr val="B4C7D2"/>
+            </a:solidFill>
+          </a:ln>
+          <a:effectLst/>
+        </p:spPr>
+      </p:cxnSp>
+      <p:cxnSp>
+        <p:nvCxnSpPr>
+          <p:cNvPr id="32" name="C1-E26 line 30" descr="sci-ppt:o030"/>
+          <p:cNvCxnSpPr/>
+          <p:nvPr/>
+        </p:nvCxnSpPr>
+        <p:spPr>
+          <a:xfrm>
+            <a:off x="7589520" y="5742432"/>
+            <a:ext cx="137159" cy="155448"/>
+          </a:xfrm>
+          <a:prstGeom prst="line">
+            <a:avLst/>
+          </a:prstGeom>
+          <a:ln w="12700">
+            <a:solidFill>
+              <a:srgbClr val="B4C7D2"/>
+            </a:solidFill>
+          </a:ln>
+          <a:effectLst/>
+        </p:spPr>
+      </p:cxnSp>
+      <p:cxnSp>
+        <p:nvCxnSpPr>
+          <p:cNvPr id="33" name="C1-E26 line 31" descr="sci-ppt:o031"/>
+          <p:cNvCxnSpPr/>
+          <p:nvPr/>
+        </p:nvCxnSpPr>
+        <p:spPr>
+          <a:xfrm>
+            <a:off x="7818120" y="5742432"/>
+            <a:ext cx="137159" cy="155448"/>
+          </a:xfrm>
+          <a:prstGeom prst="line">
+            <a:avLst/>
+          </a:prstGeom>
+          <a:ln w="12700">
+            <a:solidFill>
+              <a:srgbClr val="B4C7D2"/>
+            </a:solidFill>
+          </a:ln>
+          <a:effectLst/>
+        </p:spPr>
+      </p:cxnSp>
+      <p:cxnSp>
+        <p:nvCxnSpPr>
+          <p:cNvPr id="34" name="C1-E26 line 32" descr="sci-ppt:o032"/>
+          <p:cNvCxnSpPr/>
+          <p:nvPr/>
+        </p:nvCxnSpPr>
+        <p:spPr>
+          <a:xfrm>
+            <a:off x="8046720" y="5742432"/>
+            <a:ext cx="137159" cy="155448"/>
+          </a:xfrm>
+          <a:prstGeom prst="line">
+            <a:avLst/>
+          </a:prstGeom>
+          <a:ln w="12700">
+            <a:solidFill>
+              <a:srgbClr val="B4C7D2"/>
+            </a:solidFill>
+          </a:ln>
+          <a:effectLst/>
+        </p:spPr>
+      </p:cxnSp>
+      <p:cxnSp>
+        <p:nvCxnSpPr>
+          <p:cNvPr id="35" name="C1-E26 line 33" descr="sci-ppt:o033"/>
+          <p:cNvCxnSpPr/>
+          <p:nvPr/>
+        </p:nvCxnSpPr>
+        <p:spPr>
+          <a:xfrm>
+            <a:off x="8275320" y="5742432"/>
+            <a:ext cx="137160" cy="155448"/>
+          </a:xfrm>
+          <a:prstGeom prst="line">
+            <a:avLst/>
+          </a:prstGeom>
+          <a:ln w="12700">
+            <a:solidFill>
+              <a:srgbClr val="B4C7D2"/>
+            </a:solidFill>
+          </a:ln>
+          <a:effectLst/>
+        </p:spPr>
+      </p:cxnSp>
+      <p:cxnSp>
+        <p:nvCxnSpPr>
+          <p:cNvPr id="36" name="C1-E26 line 34" descr="sci-ppt:o034"/>
+          <p:cNvCxnSpPr/>
+          <p:nvPr/>
+        </p:nvCxnSpPr>
+        <p:spPr>
+          <a:xfrm>
+            <a:off x="8503920" y="5742432"/>
+            <a:ext cx="137160" cy="155448"/>
+          </a:xfrm>
+          <a:prstGeom prst="line">
+            <a:avLst/>
+          </a:prstGeom>
+          <a:ln w="12700">
+            <a:solidFill>
+              <a:srgbClr val="B4C7D2"/>
+            </a:solidFill>
+          </a:ln>
+          <a:effectLst/>
+        </p:spPr>
+      </p:cxnSp>
+      <p:cxnSp>
+        <p:nvCxnSpPr>
+          <p:cNvPr id="37" name="C1-E26 line 35" descr="sci-ppt:o035"/>
+          <p:cNvCxnSpPr/>
+          <p:nvPr/>
+        </p:nvCxnSpPr>
+        <p:spPr>
+          <a:xfrm>
+            <a:off x="8732520" y="5742432"/>
+            <a:ext cx="137160" cy="155448"/>
+          </a:xfrm>
+          <a:prstGeom prst="line">
+            <a:avLst/>
+          </a:prstGeom>
+          <a:ln w="12700">
+            <a:solidFill>
+              <a:srgbClr val="B4C7D2"/>
+            </a:solidFill>
+          </a:ln>
+          <a:effectLst/>
+        </p:spPr>
+      </p:cxnSp>
+      <p:cxnSp>
+        <p:nvCxnSpPr>
+          <p:cNvPr id="38" name="C1-E26 line 36" descr="sci-ppt:o036"/>
+          <p:cNvCxnSpPr/>
+          <p:nvPr/>
+        </p:nvCxnSpPr>
+        <p:spPr>
+          <a:xfrm>
+            <a:off x="8961120" y="5742432"/>
+            <a:ext cx="137160" cy="155448"/>
+          </a:xfrm>
+          <a:prstGeom prst="line">
+            <a:avLst/>
+          </a:prstGeom>
+          <a:ln w="12700">
+            <a:solidFill>
+              <a:srgbClr val="B4C7D2"/>
+            </a:solidFill>
+          </a:ln>
+          <a:effectLst/>
+        </p:spPr>
+      </p:cxnSp>
+      <p:cxnSp>
+        <p:nvCxnSpPr>
+          <p:cNvPr id="39" name="C1-E26 line 37" descr="sci-ppt:o037"/>
+          <p:cNvCxnSpPr/>
+          <p:nvPr/>
+        </p:nvCxnSpPr>
+        <p:spPr>
+          <a:xfrm>
+            <a:off x="9189720" y="5742432"/>
+            <a:ext cx="137160" cy="155448"/>
+          </a:xfrm>
+          <a:prstGeom prst="line">
+            <a:avLst/>
+          </a:prstGeom>
+          <a:ln w="12700">
+            <a:solidFill>
+              <a:srgbClr val="B4C7D2"/>
+            </a:solidFill>
+          </a:ln>
+          <a:effectLst/>
+        </p:spPr>
+      </p:cxnSp>
+      <p:cxnSp>
+        <p:nvCxnSpPr>
+          <p:cNvPr id="40" name="C1-E26 line 38" descr="sci-ppt:o038"/>
+          <p:cNvCxnSpPr/>
+          <p:nvPr/>
+        </p:nvCxnSpPr>
+        <p:spPr>
+          <a:xfrm>
+            <a:off x="9418320" y="5742432"/>
+            <a:ext cx="137160" cy="155448"/>
+          </a:xfrm>
+          <a:prstGeom prst="line">
+            <a:avLst/>
+          </a:prstGeom>
+          <a:ln w="12700">
+            <a:solidFill>
+              <a:srgbClr val="B4C7D2"/>
+            </a:solidFill>
+          </a:ln>
+          <a:effectLst/>
+        </p:spPr>
+      </p:cxnSp>
+      <p:cxnSp>
+        <p:nvCxnSpPr>
+          <p:cNvPr id="41" name="C1-E26 line 39" descr="sci-ppt:o039"/>
+          <p:cNvCxnSpPr/>
+          <p:nvPr/>
+        </p:nvCxnSpPr>
+        <p:spPr>
+          <a:xfrm>
+            <a:off x="9646920" y="5742432"/>
+            <a:ext cx="137160" cy="155448"/>
+          </a:xfrm>
+          <a:prstGeom prst="line">
+            <a:avLst/>
+          </a:prstGeom>
+          <a:ln w="12700">
+            <a:solidFill>
+              <a:srgbClr val="B4C7D2"/>
+            </a:solidFill>
+          </a:ln>
+          <a:effectLst/>
+        </p:spPr>
+      </p:cxnSp>
+      <p:cxnSp>
+        <p:nvCxnSpPr>
+          <p:cNvPr id="42" name="C1-E26 line 40" descr="sci-ppt:o040"/>
+          <p:cNvCxnSpPr/>
+          <p:nvPr/>
+        </p:nvCxnSpPr>
+        <p:spPr>
+          <a:xfrm>
+            <a:off x="9875520" y="5742432"/>
+            <a:ext cx="137160" cy="155448"/>
+          </a:xfrm>
+          <a:prstGeom prst="line">
+            <a:avLst/>
+          </a:prstGeom>
+          <a:ln w="12700">
+            <a:solidFill>
+              <a:srgbClr val="B4C7D2"/>
+            </a:solidFill>
+          </a:ln>
+          <a:effectLst/>
+        </p:spPr>
+      </p:cxnSp>
+      <p:cxnSp>
+        <p:nvCxnSpPr>
+          <p:cNvPr id="43" name="C1-E26 line 41" descr="sci-ppt:o041"/>
+          <p:cNvCxnSpPr/>
+          <p:nvPr/>
+        </p:nvCxnSpPr>
+        <p:spPr>
+          <a:xfrm>
+            <a:off x="10104120" y="5742432"/>
+            <a:ext cx="137160" cy="155448"/>
+          </a:xfrm>
+          <a:prstGeom prst="line">
+            <a:avLst/>
+          </a:prstGeom>
+          <a:ln w="12700">
+            <a:solidFill>
+              <a:srgbClr val="B4C7D2"/>
+            </a:solidFill>
+          </a:ln>
+          <a:effectLst/>
+        </p:spPr>
+      </p:cxnSp>
+      <p:cxnSp>
+        <p:nvCxnSpPr>
+          <p:cNvPr id="44" name="C1-E26 line 42" descr="sci-ppt:o042"/>
+          <p:cNvCxnSpPr/>
+          <p:nvPr/>
+        </p:nvCxnSpPr>
+        <p:spPr>
+          <a:xfrm>
+            <a:off x="10332720" y="5742432"/>
+            <a:ext cx="137160" cy="155448"/>
+          </a:xfrm>
+          <a:prstGeom prst="line">
+            <a:avLst/>
+          </a:prstGeom>
+          <a:ln w="12700">
+            <a:solidFill>
+              <a:srgbClr val="B4C7D2"/>
+            </a:solidFill>
+          </a:ln>
+          <a:effectLst/>
+        </p:spPr>
+      </p:cxnSp>
+      <p:cxnSp>
+        <p:nvCxnSpPr>
+          <p:cNvPr id="45" name="C1-E26 line 43" descr="sci-ppt:o043"/>
+          <p:cNvCxnSpPr/>
+          <p:nvPr/>
+        </p:nvCxnSpPr>
+        <p:spPr>
+          <a:xfrm>
+            <a:off x="10561320" y="5742432"/>
+            <a:ext cx="137160" cy="155448"/>
+          </a:xfrm>
+          <a:prstGeom prst="line">
+            <a:avLst/>
+          </a:prstGeom>
+          <a:ln w="12700">
+            <a:solidFill>
+              <a:srgbClr val="B4C7D2"/>
+            </a:solidFill>
+          </a:ln>
+          <a:effectLst/>
+        </p:spPr>
+      </p:cxnSp>
+      <p:cxnSp>
+        <p:nvCxnSpPr>
+          <p:cNvPr id="46" name="C1-E26 line 44" descr="sci-ppt:o044"/>
+          <p:cNvCxnSpPr/>
+          <p:nvPr/>
+        </p:nvCxnSpPr>
+        <p:spPr>
+          <a:xfrm>
+            <a:off x="10789920" y="5742432"/>
+            <a:ext cx="137160" cy="155448"/>
+          </a:xfrm>
+          <a:prstGeom prst="line">
+            <a:avLst/>
+          </a:prstGeom>
+          <a:ln w="12700">
+            <a:solidFill>
+              <a:srgbClr val="B4C7D2"/>
+            </a:solidFill>
+          </a:ln>
+          <a:effectLst/>
+        </p:spPr>
+      </p:cxnSp>
+      <p:cxnSp>
+        <p:nvCxnSpPr>
+          <p:cNvPr id="47" name="C1-E26 line 45" descr="sci-ppt:o045"/>
+          <p:cNvCxnSpPr/>
+          <p:nvPr/>
+        </p:nvCxnSpPr>
+        <p:spPr>
+          <a:xfrm>
+            <a:off x="11018520" y="5742432"/>
+            <a:ext cx="137160" cy="155448"/>
+          </a:xfrm>
+          <a:prstGeom prst="line">
+            <a:avLst/>
+          </a:prstGeom>
+          <a:ln w="12700">
+            <a:solidFill>
+              <a:srgbClr val="B4C7D2"/>
+            </a:solidFill>
+          </a:ln>
+          <a:effectLst/>
+        </p:spPr>
+      </p:cxnSp>
+      <p:cxnSp>
+        <p:nvCxnSpPr>
+          <p:cNvPr id="48" name="C1-E26 line 46" descr="sci-ppt:o046"/>
+          <p:cNvCxnSpPr/>
+          <p:nvPr/>
+        </p:nvCxnSpPr>
+        <p:spPr>
+          <a:xfrm>
+            <a:off x="11247120" y="5742432"/>
+            <a:ext cx="137160" cy="155448"/>
+          </a:xfrm>
+          <a:prstGeom prst="line">
+            <a:avLst/>
+          </a:prstGeom>
+          <a:ln w="12700">
+            <a:solidFill>
+              <a:srgbClr val="B4C7D2"/>
+            </a:solidFill>
+          </a:ln>
+          <a:effectLst/>
+        </p:spPr>
+      </p:cxnSp>
+      <p:cxnSp>
+        <p:nvCxnSpPr>
+          <p:cNvPr id="49" name="C1-E26 line 47" descr="sci-ppt:o047"/>
+          <p:cNvCxnSpPr/>
+          <p:nvPr/>
+        </p:nvCxnSpPr>
+        <p:spPr>
+          <a:xfrm>
+            <a:off x="11475720" y="5742432"/>
+            <a:ext cx="137160" cy="155448"/>
+          </a:xfrm>
+          <a:prstGeom prst="line">
+            <a:avLst/>
+          </a:prstGeom>
+          <a:ln w="12700">
+            <a:solidFill>
+              <a:srgbClr val="B4C7D2"/>
+            </a:solidFill>
+          </a:ln>
+          <a:effectLst/>
+        </p:spPr>
+      </p:cxnSp>
+      <p:sp>
+        <p:nvSpPr>
+          <p:cNvPr id="50" name="C1-E26 text 48" descr="sci-ppt:o048"/>
           <p:cNvSpPr txBox="1"/>
           <p:nvPr/>
         </p:nvSpPr>
         <p:spPr>
           <a:xfrm>
-            <a:off x="5242560" y="1987296"/>
-            <a:ext cx="5852160" cy="359054"/>
+            <a:off x="4754880" y="914400"/>
+            <a:ext cx="7040880" cy="262636"/>
           </a:xfrm>
           <a:prstGeom prst="rect">
             <a:avLst/>
@@ -3330,7 +4310,7 @@
           <a:effectLst/>
         </p:spPr>
         <p:txBody>
-          <a:bodyPr wrap="none" lIns="27432" rIns="27432" tIns="18288" bIns="18288" anchor="ctr">
+          <a:bodyPr wrap="none" lIns="18288" rIns="18288" tIns="18288" bIns="18288" anchor="t">
             <a:spAutoFit/>
           </a:bodyPr>
           <a:lstStyle/>
@@ -3341,63 +4321,751 @@
               </a:spcAft>
             </a:pPr>
             <a:r>
-              <a:rPr sz="1823" b="0" i="0">
+              <a:rPr sz="1400" b="1" i="0">
+                <a:solidFill>
+                  <a:srgbClr val="8EDBD4"/>
+                </a:solidFill>
+                <a:latin typeface="Arial"/>
+              </a:rPr>
+              <a:t>Stand-off γ = h / Rₘₐₓ locates the boundary</a:t>
+            </a:r>
+          </a:p>
+        </p:txBody>
+      </p:sp>
+      <p:sp>
+        <p:nvSpPr>
+          <p:cNvPr id="51" name="C1-E26 ellipse 49" descr="sci-ppt:o049"/>
+          <p:cNvSpPr/>
+          <p:nvPr/>
+        </p:nvSpPr>
+        <p:spPr>
+          <a:xfrm>
+            <a:off x="5257800" y="4123944"/>
+            <a:ext cx="1188720" cy="1188720"/>
+          </a:xfrm>
+          <a:prstGeom prst="ellipse">
+            <a:avLst/>
+          </a:prstGeom>
+          <a:solidFill>
+            <a:srgbClr val="0C1820"/>
+          </a:solidFill>
+          <a:ln w="25400">
+            <a:solidFill>
+              <a:srgbClr val="F2B880"/>
+            </a:solidFill>
+          </a:ln>
+          <a:effectLst/>
+        </p:spPr>
+        <p:txBody>
+          <a:bodyPr rtlCol="0" anchor="ctr"/>
+          <a:lstStyle/>
+          <a:p>
+            <a:pPr algn="ctr"/>
+          </a:p>
+        </p:txBody>
+      </p:sp>
+      <p:cxnSp>
+        <p:nvCxnSpPr>
+          <p:cNvPr id="52" name="C1-E26 line 50" descr="sci-ppt:o050"/>
+          <p:cNvCxnSpPr/>
+          <p:nvPr/>
+        </p:nvCxnSpPr>
+        <p:spPr>
+          <a:xfrm>
+            <a:off x="5852160" y="4718304"/>
+            <a:ext cx="0" cy="768096"/>
+          </a:xfrm>
+          <a:prstGeom prst="line">
+            <a:avLst/>
+          </a:prstGeom>
+          <a:ln w="15240">
+            <a:solidFill>
+              <a:srgbClr val="B4C7D2"/>
+            </a:solidFill>
+            <a:prstDash val="dash"/>
+          </a:ln>
+          <a:effectLst/>
+        </p:spPr>
+      </p:cxnSp>
+      <p:cxnSp>
+        <p:nvCxnSpPr>
+          <p:cNvPr id="53" name="C1-E26 line 51" descr="sci-ppt:o051"/>
+          <p:cNvCxnSpPr/>
+          <p:nvPr/>
+        </p:nvCxnSpPr>
+        <p:spPr>
+          <a:xfrm>
+            <a:off x="6583680" y="4718304"/>
+            <a:ext cx="0" cy="768096"/>
+          </a:xfrm>
+          <a:prstGeom prst="line">
+            <a:avLst/>
+          </a:prstGeom>
+          <a:ln w="16510">
+            <a:solidFill>
+              <a:srgbClr val="B4C7D2"/>
+            </a:solidFill>
+          </a:ln>
+          <a:effectLst/>
+        </p:spPr>
+      </p:cxnSp>
+      <p:cxnSp>
+        <p:nvCxnSpPr>
+          <p:cNvPr id="54" name="C1-E26 line 52" descr="sci-ppt:o052"/>
+          <p:cNvCxnSpPr/>
+          <p:nvPr/>
+        </p:nvCxnSpPr>
+        <p:spPr>
+          <a:xfrm flipH="1">
+            <a:off x="6519672" y="4718304"/>
+            <a:ext cx="128016" cy="0"/>
+          </a:xfrm>
+          <a:prstGeom prst="line">
+            <a:avLst/>
+          </a:prstGeom>
+          <a:ln w="16510">
+            <a:solidFill>
+              <a:srgbClr val="B4C7D2"/>
+            </a:solidFill>
+          </a:ln>
+          <a:effectLst/>
+        </p:spPr>
+      </p:cxnSp>
+      <p:cxnSp>
+        <p:nvCxnSpPr>
+          <p:cNvPr id="55" name="C1-E26 line 53" descr="sci-ppt:o053"/>
+          <p:cNvCxnSpPr/>
+          <p:nvPr/>
+        </p:nvCxnSpPr>
+        <p:spPr>
+          <a:xfrm flipH="1">
+            <a:off x="6519672" y="5486400"/>
+            <a:ext cx="128016" cy="0"/>
+          </a:xfrm>
+          <a:prstGeom prst="line">
+            <a:avLst/>
+          </a:prstGeom>
+          <a:ln w="16510">
+            <a:solidFill>
+              <a:srgbClr val="B4C7D2"/>
+            </a:solidFill>
+          </a:ln>
+          <a:effectLst/>
+        </p:spPr>
+      </p:cxnSp>
+      <p:sp>
+        <p:nvSpPr>
+          <p:cNvPr id="56" name="C1-E26 text 54" descr="sci-ppt:o054"/>
+          <p:cNvSpPr txBox="1"/>
+          <p:nvPr/>
+        </p:nvSpPr>
+        <p:spPr>
+          <a:xfrm>
+            <a:off x="5486400" y="5018532"/>
+            <a:ext cx="1828800" cy="216153"/>
+          </a:xfrm>
+          <a:prstGeom prst="rect">
+            <a:avLst/>
+          </a:prstGeom>
+          <a:noFill/>
+          <a:effectLst/>
+        </p:spPr>
+        <p:txBody>
+          <a:bodyPr wrap="none" lIns="18288" rIns="18288" tIns="18288" bIns="18288" anchor="t">
+            <a:spAutoFit/>
+          </a:bodyPr>
+          <a:lstStyle/>
+          <a:p>
+            <a:pPr algn="ctr">
+              <a:spcAft>
+                <a:spcPts val="0"/>
+              </a:spcAft>
+            </a:pPr>
+          </a:p>
+        </p:txBody>
+      </p:sp>
+      <p:sp>
+        <p:nvSpPr>
+          <p:cNvPr id="57" name="C1-E26 text 55" descr="sci-ppt:o055"/>
+          <p:cNvSpPr txBox="1"/>
+          <p:nvPr/>
+        </p:nvSpPr>
+        <p:spPr>
+          <a:xfrm>
+            <a:off x="6693408" y="5010912"/>
+            <a:ext cx="1371600" cy="216153"/>
+          </a:xfrm>
+          <a:prstGeom prst="rect">
+            <a:avLst/>
+          </a:prstGeom>
+          <a:noFill/>
+          <a:effectLst/>
+        </p:spPr>
+        <p:txBody>
+          <a:bodyPr wrap="none" lIns="18288" rIns="18288" tIns="18288" bIns="18288" anchor="t">
+            <a:spAutoFit/>
+          </a:bodyPr>
+          <a:lstStyle/>
+          <a:p>
+            <a:pPr algn="l">
+              <a:spcAft>
+                <a:spcPts val="0"/>
+              </a:spcAft>
+            </a:pPr>
+            <a:r>
+              <a:rPr sz="1100" b="0" i="0">
+                <a:solidFill>
+                  <a:srgbClr val="B4C7D2"/>
+                </a:solidFill>
+                <a:latin typeface="Arial"/>
+              </a:rPr>
+              <a:t>h = 0.6 Rₘₐₓ</a:t>
+            </a:r>
+          </a:p>
+        </p:txBody>
+      </p:sp>
+      <p:sp>
+        <p:nvSpPr>
+          <p:cNvPr id="58" name="C1-E26 text 56" descr="sci-ppt:o056"/>
+          <p:cNvSpPr txBox="1"/>
+          <p:nvPr/>
+        </p:nvSpPr>
+        <p:spPr>
+          <a:xfrm>
+            <a:off x="5120640" y="3712463"/>
+            <a:ext cx="1463040" cy="254889"/>
+          </a:xfrm>
+          <a:prstGeom prst="rect">
+            <a:avLst/>
+          </a:prstGeom>
+          <a:noFill/>
+          <a:effectLst/>
+        </p:spPr>
+        <p:txBody>
+          <a:bodyPr wrap="none" lIns="18288" rIns="18288" tIns="18288" bIns="18288" anchor="t">
+            <a:spAutoFit/>
+          </a:bodyPr>
+          <a:lstStyle/>
+          <a:p>
+            <a:pPr algn="ctr">
+              <a:spcAft>
+                <a:spcPts val="0"/>
+              </a:spcAft>
+            </a:pPr>
+            <a:r>
+              <a:rPr sz="1350" b="1" i="0">
+                <a:solidFill>
+                  <a:srgbClr val="8EDBD4"/>
+                </a:solidFill>
+                <a:latin typeface="Arial"/>
+              </a:rPr>
+              <a:t>γ = 0.6</a:t>
+            </a:r>
+          </a:p>
+        </p:txBody>
+      </p:sp>
+      <p:sp>
+        <p:nvSpPr>
+          <p:cNvPr id="59" name="C1-E26 ellipse 57" descr="sci-ppt:o057"/>
+          <p:cNvSpPr/>
+          <p:nvPr/>
+        </p:nvSpPr>
+        <p:spPr>
+          <a:xfrm>
+            <a:off x="7694675" y="3568903"/>
+            <a:ext cx="1069848" cy="1069848"/>
+          </a:xfrm>
+          <a:prstGeom prst="ellipse">
+            <a:avLst/>
+          </a:prstGeom>
+          <a:solidFill>
+            <a:srgbClr val="0C1820"/>
+          </a:solidFill>
+          <a:ln w="25400">
+            <a:solidFill>
+              <a:srgbClr val="F2B880"/>
+            </a:solidFill>
+          </a:ln>
+          <a:effectLst/>
+        </p:spPr>
+        <p:txBody>
+          <a:bodyPr rtlCol="0" anchor="ctr"/>
+          <a:lstStyle/>
+          <a:p>
+            <a:pPr algn="ctr"/>
+          </a:p>
+        </p:txBody>
+      </p:sp>
+      <p:cxnSp>
+        <p:nvCxnSpPr>
+          <p:cNvPr id="60" name="C1-E26 line 58" descr="sci-ppt:o058"/>
+          <p:cNvCxnSpPr/>
+          <p:nvPr/>
+        </p:nvCxnSpPr>
+        <p:spPr>
+          <a:xfrm>
+            <a:off x="8229600" y="4103827"/>
+            <a:ext cx="0" cy="1382573"/>
+          </a:xfrm>
+          <a:prstGeom prst="line">
+            <a:avLst/>
+          </a:prstGeom>
+          <a:ln w="15240">
+            <a:solidFill>
+              <a:srgbClr val="B4C7D2"/>
+            </a:solidFill>
+            <a:prstDash val="dash"/>
+          </a:ln>
+          <a:effectLst/>
+        </p:spPr>
+      </p:cxnSp>
+      <p:cxnSp>
+        <p:nvCxnSpPr>
+          <p:cNvPr id="61" name="C1-E26 line 59" descr="sci-ppt:o059"/>
+          <p:cNvCxnSpPr/>
+          <p:nvPr/>
+        </p:nvCxnSpPr>
+        <p:spPr>
+          <a:xfrm>
+            <a:off x="8887968" y="4103827"/>
+            <a:ext cx="0" cy="1382573"/>
+          </a:xfrm>
+          <a:prstGeom prst="line">
+            <a:avLst/>
+          </a:prstGeom>
+          <a:ln w="16510">
+            <a:solidFill>
+              <a:srgbClr val="B4C7D2"/>
+            </a:solidFill>
+          </a:ln>
+          <a:effectLst/>
+        </p:spPr>
+      </p:cxnSp>
+      <p:cxnSp>
+        <p:nvCxnSpPr>
+          <p:cNvPr id="62" name="C1-E26 line 60" descr="sci-ppt:o060"/>
+          <p:cNvCxnSpPr/>
+          <p:nvPr/>
+        </p:nvCxnSpPr>
+        <p:spPr>
+          <a:xfrm flipH="1">
+            <a:off x="8823960" y="4103827"/>
+            <a:ext cx="128016" cy="0"/>
+          </a:xfrm>
+          <a:prstGeom prst="line">
+            <a:avLst/>
+          </a:prstGeom>
+          <a:ln w="16510">
+            <a:solidFill>
+              <a:srgbClr val="B4C7D2"/>
+            </a:solidFill>
+          </a:ln>
+          <a:effectLst/>
+        </p:spPr>
+      </p:cxnSp>
+      <p:cxnSp>
+        <p:nvCxnSpPr>
+          <p:cNvPr id="63" name="C1-E26 line 61" descr="sci-ppt:o061"/>
+          <p:cNvCxnSpPr/>
+          <p:nvPr/>
+        </p:nvCxnSpPr>
+        <p:spPr>
+          <a:xfrm flipH="1">
+            <a:off x="8823960" y="5486400"/>
+            <a:ext cx="128016" cy="0"/>
+          </a:xfrm>
+          <a:prstGeom prst="line">
+            <a:avLst/>
+          </a:prstGeom>
+          <a:ln w="16510">
+            <a:solidFill>
+              <a:srgbClr val="B4C7D2"/>
+            </a:solidFill>
+          </a:ln>
+          <a:effectLst/>
+        </p:spPr>
+      </p:cxnSp>
+      <p:sp>
+        <p:nvSpPr>
+          <p:cNvPr id="64" name="C1-E26 text 62" descr="sci-ppt:o062"/>
+          <p:cNvSpPr txBox="1"/>
+          <p:nvPr/>
+        </p:nvSpPr>
+        <p:spPr>
+          <a:xfrm>
+            <a:off x="7790688" y="4711293"/>
+            <a:ext cx="1828800" cy="216153"/>
+          </a:xfrm>
+          <a:prstGeom prst="rect">
+            <a:avLst/>
+          </a:prstGeom>
+          <a:noFill/>
+          <a:effectLst/>
+        </p:spPr>
+        <p:txBody>
+          <a:bodyPr wrap="none" lIns="18288" rIns="18288" tIns="18288" bIns="18288" anchor="t">
+            <a:spAutoFit/>
+          </a:bodyPr>
+          <a:lstStyle/>
+          <a:p>
+            <a:pPr algn="ctr">
+              <a:spcAft>
+                <a:spcPts val="0"/>
+              </a:spcAft>
+            </a:pPr>
+          </a:p>
+        </p:txBody>
+      </p:sp>
+      <p:sp>
+        <p:nvSpPr>
+          <p:cNvPr id="65" name="C1-E26 text 63" descr="sci-ppt:o063"/>
+          <p:cNvSpPr txBox="1"/>
+          <p:nvPr/>
+        </p:nvSpPr>
+        <p:spPr>
+          <a:xfrm>
+            <a:off x="8997696" y="4703673"/>
+            <a:ext cx="1371600" cy="216153"/>
+          </a:xfrm>
+          <a:prstGeom prst="rect">
+            <a:avLst/>
+          </a:prstGeom>
+          <a:noFill/>
+          <a:effectLst/>
+        </p:spPr>
+        <p:txBody>
+          <a:bodyPr wrap="none" lIns="18288" rIns="18288" tIns="18288" bIns="18288" anchor="t">
+            <a:spAutoFit/>
+          </a:bodyPr>
+          <a:lstStyle/>
+          <a:p>
+            <a:pPr algn="l">
+              <a:spcAft>
+                <a:spcPts val="0"/>
+              </a:spcAft>
+            </a:pPr>
+            <a:r>
+              <a:rPr sz="1100" b="0" i="0">
+                <a:solidFill>
+                  <a:srgbClr val="B4C7D2"/>
+                </a:solidFill>
+                <a:latin typeface="Arial"/>
+              </a:rPr>
+              <a:t>h = 1.2 Rₘₐₓ</a:t>
+            </a:r>
+          </a:p>
+        </p:txBody>
+      </p:sp>
+      <p:sp>
+        <p:nvSpPr>
+          <p:cNvPr id="66" name="C1-E26 text 64" descr="sci-ppt:o064"/>
+          <p:cNvSpPr txBox="1"/>
+          <p:nvPr/>
+        </p:nvSpPr>
+        <p:spPr>
+          <a:xfrm>
+            <a:off x="7498079" y="3157423"/>
+            <a:ext cx="1463040" cy="254889"/>
+          </a:xfrm>
+          <a:prstGeom prst="rect">
+            <a:avLst/>
+          </a:prstGeom>
+          <a:noFill/>
+          <a:effectLst/>
+        </p:spPr>
+        <p:txBody>
+          <a:bodyPr wrap="none" lIns="18288" rIns="18288" tIns="18288" bIns="18288" anchor="t">
+            <a:spAutoFit/>
+          </a:bodyPr>
+          <a:lstStyle/>
+          <a:p>
+            <a:pPr algn="ctr">
+              <a:spcAft>
+                <a:spcPts val="0"/>
+              </a:spcAft>
+            </a:pPr>
+            <a:r>
+              <a:rPr sz="1350" b="1" i="0">
+                <a:solidFill>
+                  <a:srgbClr val="8EDBD4"/>
+                </a:solidFill>
+                <a:latin typeface="Arial"/>
+              </a:rPr>
+              <a:t>γ = 1.2</a:t>
+            </a:r>
+          </a:p>
+        </p:txBody>
+      </p:sp>
+      <p:sp>
+        <p:nvSpPr>
+          <p:cNvPr id="67" name="C1-E26 ellipse 65" descr="sci-ppt:o065"/>
+          <p:cNvSpPr/>
+          <p:nvPr/>
+        </p:nvSpPr>
+        <p:spPr>
+          <a:xfrm>
+            <a:off x="10252709" y="2544318"/>
+            <a:ext cx="891540" cy="891540"/>
+          </a:xfrm>
+          <a:prstGeom prst="ellipse">
+            <a:avLst/>
+          </a:prstGeom>
+          <a:solidFill>
+            <a:srgbClr val="0C1820"/>
+          </a:solidFill>
+          <a:ln w="25400">
+            <a:solidFill>
+              <a:srgbClr val="F2B880"/>
+            </a:solidFill>
+          </a:ln>
+          <a:effectLst/>
+        </p:spPr>
+        <p:txBody>
+          <a:bodyPr rtlCol="0" anchor="ctr"/>
+          <a:lstStyle/>
+          <a:p>
+            <a:pPr algn="ctr"/>
+          </a:p>
+        </p:txBody>
+      </p:sp>
+      <p:cxnSp>
+        <p:nvCxnSpPr>
+          <p:cNvPr id="68" name="C1-E26 line 66" descr="sci-ppt:o066"/>
+          <p:cNvCxnSpPr/>
+          <p:nvPr/>
+        </p:nvCxnSpPr>
+        <p:spPr>
+          <a:xfrm>
+            <a:off x="10698480" y="2990088"/>
+            <a:ext cx="0" cy="2496312"/>
+          </a:xfrm>
+          <a:prstGeom prst="line">
+            <a:avLst/>
+          </a:prstGeom>
+          <a:ln w="15240">
+            <a:solidFill>
+              <a:srgbClr val="B4C7D2"/>
+            </a:solidFill>
+            <a:prstDash val="dash"/>
+          </a:ln>
+          <a:effectLst/>
+        </p:spPr>
+      </p:cxnSp>
+      <p:cxnSp>
+        <p:nvCxnSpPr>
+          <p:cNvPr id="69" name="C1-E26 line 67" descr="sci-ppt:o067"/>
+          <p:cNvCxnSpPr/>
+          <p:nvPr/>
+        </p:nvCxnSpPr>
+        <p:spPr>
+          <a:xfrm>
+            <a:off x="11247119" y="2990088"/>
+            <a:ext cx="0" cy="2496312"/>
+          </a:xfrm>
+          <a:prstGeom prst="line">
+            <a:avLst/>
+          </a:prstGeom>
+          <a:ln w="16510">
+            <a:solidFill>
+              <a:srgbClr val="B4C7D2"/>
+            </a:solidFill>
+          </a:ln>
+          <a:effectLst/>
+        </p:spPr>
+      </p:cxnSp>
+      <p:cxnSp>
+        <p:nvCxnSpPr>
+          <p:cNvPr id="70" name="C1-E26 line 68" descr="sci-ppt:o068"/>
+          <p:cNvCxnSpPr/>
+          <p:nvPr/>
+        </p:nvCxnSpPr>
+        <p:spPr>
+          <a:xfrm flipH="1">
+            <a:off x="11183111" y="2990088"/>
+            <a:ext cx="128017" cy="0"/>
+          </a:xfrm>
+          <a:prstGeom prst="line">
+            <a:avLst/>
+          </a:prstGeom>
+          <a:ln w="16510">
+            <a:solidFill>
+              <a:srgbClr val="B4C7D2"/>
+            </a:solidFill>
+          </a:ln>
+          <a:effectLst/>
+        </p:spPr>
+      </p:cxnSp>
+      <p:cxnSp>
+        <p:nvCxnSpPr>
+          <p:cNvPr id="71" name="C1-E26 line 69" descr="sci-ppt:o069"/>
+          <p:cNvCxnSpPr/>
+          <p:nvPr/>
+        </p:nvCxnSpPr>
+        <p:spPr>
+          <a:xfrm flipH="1">
+            <a:off x="11183111" y="5486400"/>
+            <a:ext cx="128017" cy="0"/>
+          </a:xfrm>
+          <a:prstGeom prst="line">
+            <a:avLst/>
+          </a:prstGeom>
+          <a:ln w="16510">
+            <a:solidFill>
+              <a:srgbClr val="B4C7D2"/>
+            </a:solidFill>
+          </a:ln>
+          <a:effectLst/>
+        </p:spPr>
+      </p:cxnSp>
+      <p:sp>
+        <p:nvSpPr>
+          <p:cNvPr id="72" name="C1-E26 text 70" descr="sci-ppt:o070"/>
+          <p:cNvSpPr txBox="1"/>
+          <p:nvPr/>
+        </p:nvSpPr>
+        <p:spPr>
+          <a:xfrm>
+            <a:off x="10149840" y="4154423"/>
+            <a:ext cx="1828800" cy="216153"/>
+          </a:xfrm>
+          <a:prstGeom prst="rect">
+            <a:avLst/>
+          </a:prstGeom>
+          <a:noFill/>
+          <a:effectLst/>
+        </p:spPr>
+        <p:txBody>
+          <a:bodyPr wrap="none" lIns="18288" rIns="18288" tIns="18288" bIns="18288" anchor="t">
+            <a:spAutoFit/>
+          </a:bodyPr>
+          <a:lstStyle/>
+          <a:p>
+            <a:pPr algn="ctr">
+              <a:spcAft>
+                <a:spcPts val="0"/>
+              </a:spcAft>
+            </a:pPr>
+          </a:p>
+        </p:txBody>
+      </p:sp>
+      <p:sp>
+        <p:nvSpPr>
+          <p:cNvPr id="73" name="C1-E26 text 71" descr="sci-ppt:o071"/>
+          <p:cNvSpPr txBox="1"/>
+          <p:nvPr/>
+        </p:nvSpPr>
+        <p:spPr>
+          <a:xfrm>
+            <a:off x="11356847" y="4146804"/>
+            <a:ext cx="1371600" cy="216153"/>
+          </a:xfrm>
+          <a:prstGeom prst="rect">
+            <a:avLst/>
+          </a:prstGeom>
+          <a:noFill/>
+          <a:effectLst/>
+        </p:spPr>
+        <p:txBody>
+          <a:bodyPr wrap="none" lIns="18288" rIns="18288" tIns="18288" bIns="18288" anchor="t">
+            <a:spAutoFit/>
+          </a:bodyPr>
+          <a:lstStyle/>
+          <a:p>
+            <a:pPr algn="l">
+              <a:spcAft>
+                <a:spcPts val="0"/>
+              </a:spcAft>
+            </a:pPr>
+            <a:r>
+              <a:rPr sz="1100" b="0" i="0">
+                <a:solidFill>
+                  <a:srgbClr val="B4C7D2"/>
+                </a:solidFill>
+                <a:latin typeface="Arial"/>
+              </a:rPr>
+              <a:t>h = 2.6 Rₘₐₓ</a:t>
+            </a:r>
+          </a:p>
+        </p:txBody>
+      </p:sp>
+      <p:sp>
+        <p:nvSpPr>
+          <p:cNvPr id="74" name="C1-E26 text 72" descr="sci-ppt:o072"/>
+          <p:cNvSpPr txBox="1"/>
+          <p:nvPr/>
+        </p:nvSpPr>
+        <p:spPr>
+          <a:xfrm>
+            <a:off x="9966959" y="2132837"/>
+            <a:ext cx="1463040" cy="254889"/>
+          </a:xfrm>
+          <a:prstGeom prst="rect">
+            <a:avLst/>
+          </a:prstGeom>
+          <a:noFill/>
+          <a:effectLst/>
+        </p:spPr>
+        <p:txBody>
+          <a:bodyPr wrap="none" lIns="18288" rIns="18288" tIns="18288" bIns="18288" anchor="t">
+            <a:spAutoFit/>
+          </a:bodyPr>
+          <a:lstStyle/>
+          <a:p>
+            <a:pPr algn="ctr">
+              <a:spcAft>
+                <a:spcPts val="0"/>
+              </a:spcAft>
+            </a:pPr>
+            <a:r>
+              <a:rPr sz="1350" b="1" i="0">
+                <a:solidFill>
+                  <a:srgbClr val="8EDBD4"/>
+                </a:solidFill>
+                <a:latin typeface="Arial"/>
+              </a:rPr>
+              <a:t>γ = 2.6</a:t>
+            </a:r>
+          </a:p>
+        </p:txBody>
+      </p:sp>
+      <p:sp>
+        <p:nvSpPr>
+          <p:cNvPr id="75" name="C1-E26 text 73" descr="sci-ppt:o073"/>
+          <p:cNvSpPr txBox="1"/>
+          <p:nvPr/>
+        </p:nvSpPr>
+        <p:spPr>
+          <a:xfrm>
+            <a:off x="4754880" y="1371600"/>
+            <a:ext cx="7040880" cy="433070"/>
+          </a:xfrm>
+          <a:prstGeom prst="rect">
+            <a:avLst/>
+          </a:prstGeom>
+          <a:noFill/>
+          <a:effectLst/>
+        </p:spPr>
+        <p:txBody>
+          <a:bodyPr wrap="none" lIns="18288" rIns="18288" tIns="18288" bIns="18288" anchor="t">
+            <a:spAutoFit/>
+          </a:bodyPr>
+          <a:lstStyle/>
+          <a:p>
+            <a:pPr algn="l">
+              <a:spcAft>
+                <a:spcPts val="0"/>
+              </a:spcAft>
+            </a:pPr>
+            <a:r>
+              <a:rPr sz="1250" b="0" i="0">
                 <a:solidFill>
                   <a:srgbClr val="E7F0F3"/>
                 </a:solidFill>
                 <a:latin typeface="Arial"/>
               </a:rPr>
-              <a:t>p∞, ρ, μ; interface: σ</a:t>
-            </a:r>
-          </a:p>
-        </p:txBody>
-      </p:sp>
-      <p:cxnSp>
-        <p:nvCxnSpPr>
-          <p:cNvPr id="9" name="arrow8" descr="sci-ppt:C1-E26-008"/>
-          <p:cNvCxnSpPr/>
-          <p:nvPr/>
-        </p:nvCxnSpPr>
-        <p:spPr>
-          <a:xfrm>
-            <a:off x="3291840" y="2621280"/>
-            <a:ext cx="1706880" cy="1158240"/>
-          </a:xfrm>
-          <a:prstGeom prst="line">
-            <a:avLst/>
-          </a:prstGeom>
-          <a:ln w="25400">
-            <a:solidFill>
-              <a:srgbClr val="8EDBD4"/>
-            </a:solidFill>
-            <a:headEnd type="none" w="med" len="med"/>
-            <a:tailEnd type="triangle" w="med" len="med"/>
-          </a:ln>
-          <a:effectLst/>
-        </p:spPr>
-      </p:cxnSp>
-      <p:sp>
-        <p:nvSpPr>
-          <p:cNvPr id="10" name="text9" descr="sci-ppt:C1-E26-009"/>
-          <p:cNvSpPr txBox="1"/>
-          <p:nvPr/>
-        </p:nvSpPr>
-        <p:spPr>
-          <a:xfrm>
-            <a:off x="5364480" y="3657600"/>
-            <a:ext cx="1950720" cy="340156"/>
-          </a:xfrm>
-          <a:prstGeom prst="rect">
-            <a:avLst/>
-          </a:prstGeom>
-          <a:noFill/>
-          <a:effectLst/>
-        </p:spPr>
-        <p:txBody>
-          <a:bodyPr wrap="none" lIns="27432" rIns="27432" tIns="18288" bIns="18288" anchor="ctr">
-            <a:spAutoFit/>
-          </a:bodyPr>
-          <a:lstStyle/>
+              <a:t>Small γ: boundary close, strong asymmetry.   Large γ: far boundary, nearly</a:t>
+            </a:r>
+          </a:p>
           <a:p>
             <a:pPr algn="l">
               <a:spcAft>
@@ -3405,51 +5073,27 @@
               </a:spcAft>
             </a:pPr>
             <a:r>
-              <a:rPr sz="1728" b="0" i="0">
+              <a:rPr sz="1250" b="0" i="0">
                 <a:solidFill>
                   <a:srgbClr val="E7F0F3"/>
                 </a:solidFill>
                 <a:latin typeface="Arial"/>
               </a:rPr>
-              <a:t>r ≥ R</a:t>
-            </a:r>
-          </a:p>
-        </p:txBody>
-      </p:sp>
-      <p:cxnSp>
-        <p:nvCxnSpPr>
-          <p:cNvPr id="11" name="arrow10" descr="sci-ppt:C1-E26-010"/>
-          <p:cNvCxnSpPr/>
-          <p:nvPr/>
-        </p:nvCxnSpPr>
-        <p:spPr>
-          <a:xfrm>
-            <a:off x="4998720" y="2621280"/>
-            <a:ext cx="792480" cy="0"/>
-          </a:xfrm>
-          <a:prstGeom prst="line">
-            <a:avLst/>
-          </a:prstGeom>
-          <a:ln w="25400">
-            <a:solidFill>
-              <a:srgbClr val="8EDBD4"/>
-            </a:solidFill>
-            <a:headEnd type="none" w="med" len="med"/>
-            <a:tailEnd type="triangle" w="med" len="med"/>
-          </a:ln>
-          <a:effectLst/>
-        </p:spPr>
-      </p:cxnSp>
-      <p:sp>
-        <p:nvSpPr>
-          <p:cNvPr id="12" name="text11" descr="sci-ppt:C1-E26-011"/>
+              <a:t>spherical.</a:t>
+            </a:r>
+          </a:p>
+        </p:txBody>
+      </p:sp>
+      <p:sp>
+        <p:nvSpPr>
+          <p:cNvPr id="76" name="C1-E26 text 74" descr="sci-ppt:o074"/>
           <p:cNvSpPr txBox="1"/>
           <p:nvPr/>
         </p:nvSpPr>
         <p:spPr>
           <a:xfrm>
-            <a:off x="5059680" y="2865120"/>
-            <a:ext cx="3291840" cy="321259"/>
+            <a:off x="320040" y="6510528"/>
+            <a:ext cx="11521440" cy="200660"/>
           </a:xfrm>
           <a:prstGeom prst="rect">
             <a:avLst/>
@@ -3458,7 +5102,7 @@
           <a:effectLst/>
         </p:spPr>
         <p:txBody>
-          <a:bodyPr wrap="none" lIns="27432" rIns="27432" tIns="18288" bIns="18288" anchor="ctr">
+          <a:bodyPr wrap="none" lIns="18288" rIns="18288" tIns="18288" bIns="18288" anchor="t">
             <a:spAutoFit/>
           </a:bodyPr>
           <a:lstStyle/>
@@ -3469,521 +5113,13 @@
               </a:spcAft>
             </a:pPr>
             <a:r>
-              <a:rPr sz="1632" b="0" i="0">
-                <a:solidFill>
-                  <a:srgbClr val="E7F0F3"/>
-                </a:solidFill>
-                <a:latin typeface="Arial"/>
-              </a:rPr>
-              <a:t>+e_r (coordinate)</a:t>
-            </a:r>
-          </a:p>
-        </p:txBody>
-      </p:sp>
-      <p:sp>
-        <p:nvSpPr>
-          <p:cNvPr id="13" name="text12" descr="sci-ppt:C1-E26-012"/>
-          <p:cNvSpPr txBox="1"/>
-          <p:nvPr/>
-        </p:nvSpPr>
-        <p:spPr>
-          <a:xfrm>
-            <a:off x="1219200" y="4206240"/>
-            <a:ext cx="9753600" cy="340156"/>
-          </a:xfrm>
-          <a:prstGeom prst="rect">
-            <a:avLst/>
-          </a:prstGeom>
-          <a:noFill/>
-          <a:effectLst/>
-        </p:spPr>
-        <p:txBody>
-          <a:bodyPr wrap="none" lIns="27432" rIns="27432" tIns="18288" bIns="18288" anchor="ctr">
-            <a:spAutoFit/>
-          </a:bodyPr>
-          <a:lstStyle/>
-          <a:p>
-            <a:pPr algn="l">
-              <a:spcAft>
-                <a:spcPts val="0"/>
-              </a:spcAft>
-            </a:pPr>
-            <a:r>
-              <a:rPr sz="1728" b="0" i="0">
-                <a:solidFill>
-                  <a:srgbClr val="E7F0F3"/>
-                </a:solidFill>
-                <a:latin typeface="Arial"/>
-              </a:rPr>
-              <a:t>Signed wall speed: Ṙ; acceleration: R̈</a:t>
-            </a:r>
-          </a:p>
-        </p:txBody>
-      </p:sp>
-      <p:cxnSp>
-        <p:nvCxnSpPr>
-          <p:cNvPr id="14" name="line13" descr="sci-ppt:C1-E26-013"/>
-          <p:cNvCxnSpPr/>
-          <p:nvPr/>
-        </p:nvCxnSpPr>
-        <p:spPr>
-          <a:xfrm>
-            <a:off x="975360" y="1158240"/>
-            <a:ext cx="0" cy="2987040"/>
-          </a:xfrm>
-          <a:prstGeom prst="line">
-            <a:avLst/>
-          </a:prstGeom>
-          <a:ln w="25400">
-            <a:solidFill>
-              <a:srgbClr val="B4C7D2"/>
-            </a:solidFill>
-          </a:ln>
-          <a:effectLst/>
-        </p:spPr>
-      </p:cxnSp>
-      <p:cxnSp>
-        <p:nvCxnSpPr>
-          <p:cNvPr id="15" name="line14" descr="sci-ppt:C1-E26-014"/>
-          <p:cNvCxnSpPr/>
-          <p:nvPr/>
-        </p:nvCxnSpPr>
-        <p:spPr>
-          <a:xfrm>
-            <a:off x="975360" y="1219200"/>
-            <a:ext cx="2316480" cy="0"/>
-          </a:xfrm>
-          <a:prstGeom prst="line">
-            <a:avLst/>
-          </a:prstGeom>
-          <a:ln w="25400">
-            <a:solidFill>
-              <a:srgbClr val="8EDBD4"/>
-            </a:solidFill>
-          </a:ln>
-          <a:effectLst/>
-        </p:spPr>
-      </p:cxnSp>
-      <p:sp>
-        <p:nvSpPr>
-          <p:cNvPr id="16" name="text15" descr="sci-ppt:C1-E26-015"/>
-          <p:cNvSpPr txBox="1"/>
-          <p:nvPr/>
-        </p:nvSpPr>
-        <p:spPr>
-          <a:xfrm>
-            <a:off x="1584960" y="853440"/>
-            <a:ext cx="1463040" cy="340156"/>
-          </a:xfrm>
-          <a:prstGeom prst="rect">
-            <a:avLst/>
-          </a:prstGeom>
-          <a:noFill/>
-          <a:effectLst/>
-        </p:spPr>
-        <p:txBody>
-          <a:bodyPr wrap="none" lIns="27432" rIns="27432" tIns="18288" bIns="18288" anchor="ctr">
-            <a:spAutoFit/>
-          </a:bodyPr>
-          <a:lstStyle/>
-          <a:p>
-            <a:pPr algn="l">
-              <a:spcAft>
-                <a:spcPts val="0"/>
-              </a:spcAft>
-            </a:pPr>
-            <a:r>
-              <a:rPr sz="1728" b="0" i="0">
-                <a:solidFill>
-                  <a:srgbClr val="E7F0F3"/>
-                </a:solidFill>
-                <a:latin typeface="Arial"/>
-              </a:rPr>
-              <a:t>h</a:t>
-            </a:r>
-          </a:p>
-        </p:txBody>
-      </p:sp>
-      <p:cxnSp>
-        <p:nvCxnSpPr>
-          <p:cNvPr id="17" name="arrow16" descr="sci-ppt:C1-E26-016"/>
-          <p:cNvCxnSpPr/>
-          <p:nvPr/>
-        </p:nvCxnSpPr>
-        <p:spPr>
-          <a:xfrm>
-            <a:off x="1645920" y="2621280"/>
-            <a:ext cx="426720" cy="0"/>
-          </a:xfrm>
-          <a:prstGeom prst="line">
-            <a:avLst/>
-          </a:prstGeom>
-          <a:ln w="25400">
-            <a:solidFill>
-              <a:srgbClr val="8EDBD4"/>
-            </a:solidFill>
-            <a:headEnd type="none" w="med" len="med"/>
-            <a:tailEnd type="triangle" w="med" len="med"/>
-          </a:ln>
-          <a:effectLst/>
-        </p:spPr>
-      </p:cxnSp>
-      <p:sp>
-        <p:nvSpPr>
-          <p:cNvPr id="18" name="text17" descr="sci-ppt:C1-E26-017"/>
-          <p:cNvSpPr txBox="1"/>
-          <p:nvPr/>
-        </p:nvSpPr>
-        <p:spPr>
-          <a:xfrm>
-            <a:off x="5852160" y="3291840"/>
-            <a:ext cx="5852160" cy="340156"/>
-          </a:xfrm>
-          <a:prstGeom prst="rect">
-            <a:avLst/>
-          </a:prstGeom>
-          <a:noFill/>
-          <a:effectLst/>
-        </p:spPr>
-        <p:txBody>
-          <a:bodyPr wrap="none" lIns="27432" rIns="27432" tIns="18288" bIns="18288" anchor="ctr">
-            <a:spAutoFit/>
-          </a:bodyPr>
-          <a:lstStyle/>
-          <a:p>
-            <a:pPr algn="l">
-              <a:spcAft>
-                <a:spcPts val="0"/>
-              </a:spcAft>
-            </a:pPr>
-            <a:r>
-              <a:rPr sz="1728" b="0" i="0">
-                <a:solidFill>
-                  <a:srgbClr val="E7F0F3"/>
-                </a:solidFill>
-                <a:latin typeface="Arial"/>
-              </a:rPr>
-              <a:t>Boundary type must be specified.</a:t>
-            </a:r>
-          </a:p>
-        </p:txBody>
-      </p:sp>
-      <p:sp>
-        <p:nvSpPr>
-          <p:cNvPr id="19" name="text18" descr="sci-ppt:C1-E26-018"/>
-          <p:cNvSpPr txBox="1"/>
-          <p:nvPr/>
-        </p:nvSpPr>
-        <p:spPr>
-          <a:xfrm>
-            <a:off x="365760" y="4974336"/>
-            <a:ext cx="5547360" cy="321259"/>
-          </a:xfrm>
-          <a:prstGeom prst="rect">
-            <a:avLst/>
-          </a:prstGeom>
-          <a:noFill/>
-          <a:effectLst/>
-        </p:spPr>
-        <p:txBody>
-          <a:bodyPr wrap="none" lIns="27432" rIns="27432" tIns="18288" bIns="18288" anchor="ctr">
-            <a:spAutoFit/>
-          </a:bodyPr>
-          <a:lstStyle/>
-          <a:p>
-            <a:pPr algn="l">
-              <a:spcAft>
-                <a:spcPts val="0"/>
-              </a:spcAft>
-            </a:pPr>
-            <a:r>
-              <a:rPr sz="1632" b="0" i="0">
-                <a:solidFill>
-                  <a:srgbClr val="E7F0F3"/>
-                </a:solidFill>
-                <a:latin typeface="Arial"/>
-              </a:rPr>
-              <a:t>h: center to boundary</a:t>
-            </a:r>
-          </a:p>
-        </p:txBody>
-      </p:sp>
-      <p:sp>
-        <p:nvSpPr>
-          <p:cNvPr id="20" name="text19" descr="sci-ppt:C1-E26-019"/>
-          <p:cNvSpPr txBox="1"/>
-          <p:nvPr/>
-        </p:nvSpPr>
-        <p:spPr>
-          <a:xfrm>
-            <a:off x="365760" y="5266944"/>
-            <a:ext cx="5547360" cy="321259"/>
-          </a:xfrm>
-          <a:prstGeom prst="rect">
-            <a:avLst/>
-          </a:prstGeom>
-          <a:noFill/>
-          <a:effectLst/>
-        </p:spPr>
-        <p:txBody>
-          <a:bodyPr wrap="none" lIns="27432" rIns="27432" tIns="18288" bIns="18288" anchor="ctr">
-            <a:spAutoFit/>
-          </a:bodyPr>
-          <a:lstStyle/>
-          <a:p>
-            <a:pPr algn="l">
-              <a:spcAft>
-                <a:spcPts val="0"/>
-              </a:spcAft>
-            </a:pPr>
-            <a:r>
-              <a:rPr sz="1632" b="0" i="0">
-                <a:solidFill>
-                  <a:srgbClr val="E7F0F3"/>
-                </a:solidFill>
-                <a:latin typeface="Arial"/>
-              </a:rPr>
-              <a:t>γ = h/Rmax</a:t>
-            </a:r>
-          </a:p>
-        </p:txBody>
-      </p:sp>
-      <p:sp>
-        <p:nvSpPr>
-          <p:cNvPr id="21" name="text20" descr="sci-ppt:C1-E26-020"/>
-          <p:cNvSpPr txBox="1"/>
-          <p:nvPr/>
-        </p:nvSpPr>
-        <p:spPr>
-          <a:xfrm>
-            <a:off x="365760" y="5559552"/>
-            <a:ext cx="5547360" cy="321259"/>
-          </a:xfrm>
-          <a:prstGeom prst="rect">
-            <a:avLst/>
-          </a:prstGeom>
-          <a:noFill/>
-          <a:effectLst/>
-        </p:spPr>
-        <p:txBody>
-          <a:bodyPr wrap="none" lIns="27432" rIns="27432" tIns="18288" bIns="18288" anchor="ctr">
-            <a:spAutoFit/>
-          </a:bodyPr>
-          <a:lstStyle/>
-          <a:p>
-            <a:pPr algn="l">
-              <a:spcAft>
-                <a:spcPts val="0"/>
-              </a:spcAft>
-            </a:pPr>
-            <a:r>
-              <a:rPr sz="1632" b="0" i="0">
-                <a:solidFill>
-                  <a:srgbClr val="E7F0F3"/>
-                </a:solidFill>
-                <a:latin typeface="Arial"/>
-              </a:rPr>
-              <a:t>S²</a:t>
-            </a:r>
-          </a:p>
-        </p:txBody>
-      </p:sp>
-      <p:sp>
-        <p:nvSpPr>
-          <p:cNvPr id="22" name="text21" descr="sci-ppt:C1-E26-021"/>
-          <p:cNvSpPr txBox="1"/>
-          <p:nvPr/>
-        </p:nvSpPr>
-        <p:spPr>
-          <a:xfrm>
-            <a:off x="365760" y="5852160"/>
-            <a:ext cx="5547360" cy="321259"/>
-          </a:xfrm>
-          <a:prstGeom prst="rect">
-            <a:avLst/>
-          </a:prstGeom>
-          <a:noFill/>
-          <a:effectLst/>
-        </p:spPr>
-        <p:txBody>
-          <a:bodyPr wrap="none" lIns="27432" rIns="27432" tIns="18288" bIns="18288" anchor="ctr">
-            <a:spAutoFit/>
-          </a:bodyPr>
-          <a:lstStyle/>
-          <a:p>
-            <a:pPr algn="l">
-              <a:spcAft>
-                <a:spcPts val="0"/>
-              </a:spcAft>
-            </a:pPr>
-            <a:r>
-              <a:rPr sz="1632" b="0" i="0">
-                <a:solidFill>
-                  <a:srgbClr val="E7F0F3"/>
-                </a:solidFill>
-                <a:latin typeface="Arial"/>
-              </a:rPr>
-              <a:t>Opposite directions cancel</a:t>
-            </a:r>
-          </a:p>
-        </p:txBody>
-      </p:sp>
-      <p:sp>
-        <p:nvSpPr>
-          <p:cNvPr id="23" name="text22" descr="sci-ppt:C1-E26-022"/>
-          <p:cNvSpPr txBox="1"/>
-          <p:nvPr/>
-        </p:nvSpPr>
-        <p:spPr>
-          <a:xfrm>
-            <a:off x="6156960" y="4974336"/>
-            <a:ext cx="5547360" cy="321259"/>
-          </a:xfrm>
-          <a:prstGeom prst="rect">
-            <a:avLst/>
-          </a:prstGeom>
-          <a:noFill/>
-          <a:effectLst/>
-        </p:spPr>
-        <p:txBody>
-          <a:bodyPr wrap="none" lIns="27432" rIns="27432" tIns="18288" bIns="18288" anchor="ctr">
-            <a:spAutoFit/>
-          </a:bodyPr>
-          <a:lstStyle/>
-          <a:p>
-            <a:pPr algn="l">
-              <a:spcAft>
-                <a:spcPts val="0"/>
-              </a:spcAft>
-            </a:pPr>
-            <a:r>
-              <a:rPr sz="1632" b="0" i="0">
-                <a:solidFill>
-                  <a:srgbClr val="E7F0F3"/>
-                </a:solidFill>
-                <a:latin typeface="Arial"/>
-              </a:rPr>
-              <a:t>Rmax</a:t>
-            </a:r>
-          </a:p>
-        </p:txBody>
-      </p:sp>
-      <p:sp>
-        <p:nvSpPr>
-          <p:cNvPr id="24" name="text23" descr="sci-ppt:C1-E26-023"/>
-          <p:cNvSpPr txBox="1"/>
-          <p:nvPr/>
-        </p:nvSpPr>
-        <p:spPr>
-          <a:xfrm>
-            <a:off x="6156960" y="5266944"/>
-            <a:ext cx="5547360" cy="321259"/>
-          </a:xfrm>
-          <a:prstGeom prst="rect">
-            <a:avLst/>
-          </a:prstGeom>
-          <a:noFill/>
-          <a:effectLst/>
-        </p:spPr>
-        <p:txBody>
-          <a:bodyPr wrap="none" lIns="27432" rIns="27432" tIns="18288" bIns="18288" anchor="ctr">
-            <a:spAutoFit/>
-          </a:bodyPr>
-          <a:lstStyle/>
-          <a:p>
-            <a:pPr algn="l">
-              <a:spcAft>
-                <a:spcPts val="0"/>
-              </a:spcAft>
-            </a:pPr>
-            <a:r>
-              <a:rPr sz="1632" b="0" i="0">
-                <a:solidFill>
-                  <a:srgbClr val="E7F0F3"/>
-                </a:solidFill>
-                <a:latin typeface="Arial"/>
-              </a:rPr>
-              <a:t>er</a:t>
-            </a:r>
-          </a:p>
-        </p:txBody>
-      </p:sp>
-      <p:sp>
-        <p:nvSpPr>
-          <p:cNvPr id="25" name="text24" descr="sci-ppt:C1-E26-024"/>
-          <p:cNvSpPr txBox="1"/>
-          <p:nvPr/>
-        </p:nvSpPr>
-        <p:spPr>
-          <a:xfrm>
-            <a:off x="6156960" y="5559552"/>
-            <a:ext cx="5547360" cy="321259"/>
-          </a:xfrm>
-          <a:prstGeom prst="rect">
-            <a:avLst/>
-          </a:prstGeom>
-          <a:noFill/>
-          <a:effectLst/>
-        </p:spPr>
-        <p:txBody>
-          <a:bodyPr wrap="none" lIns="27432" rIns="27432" tIns="18288" bIns="18288" anchor="ctr">
-            <a:spAutoFit/>
-          </a:bodyPr>
-          <a:lstStyle/>
-          <a:p>
-            <a:pPr algn="l">
-              <a:spcAft>
-                <a:spcPts val="0"/>
-              </a:spcAft>
-            </a:pPr>
-            <a:r>
-              <a:rPr sz="1632" b="0" i="0">
-                <a:solidFill>
-                  <a:srgbClr val="E7F0F3"/>
-                </a:solidFill>
-                <a:latin typeface="Arial"/>
-              </a:rPr>
-              <a:t>dΩ</a:t>
-            </a:r>
-          </a:p>
-        </p:txBody>
-      </p:sp>
-      <p:sp>
-        <p:nvSpPr>
-          <p:cNvPr id="26" name="text25" descr="sci-ppt:C1-E26-025"/>
-          <p:cNvSpPr txBox="1"/>
-          <p:nvPr/>
-        </p:nvSpPr>
-        <p:spPr>
-          <a:xfrm>
-            <a:off x="365760" y="6339840"/>
-            <a:ext cx="11277600" cy="302361"/>
-          </a:xfrm>
-          <a:prstGeom prst="rect">
-            <a:avLst/>
-          </a:prstGeom>
-          <a:noFill/>
-          <a:effectLst/>
-        </p:spPr>
-        <p:txBody>
-          <a:bodyPr wrap="none" lIns="27432" rIns="27432" tIns="18288" bIns="18288" anchor="ctr">
-            <a:spAutoFit/>
-          </a:bodyPr>
-          <a:lstStyle/>
-          <a:p>
-            <a:pPr algn="l">
-              <a:spcAft>
-                <a:spcPts val="0"/>
-              </a:spcAft>
-            </a:pPr>
-            <a:r>
-              <a:rPr sz="1536" b="0" i="0">
+              <a:rPr sz="1000" b="0" i="0">
                 <a:solidFill>
                   <a:srgbClr val="B4C7D2"/>
                 </a:solidFill>
                 <a:latin typeface="Arial"/>
               </a:rPr>
-              <a:t>The relevant boundary type and curvature must also be specified</a:t>
+              <a:t>Definitions of Eq. C1-E26. Positions drawn to show the trend; radii are not to scale.</a:t>
             </a:r>
           </a:p>
         </p:txBody>

--- a/assets/figures-editable/c1-c2/c1-e26.pptx
+++ b/assets/figures-editable/c1-c2/c1-e26.pptx
@@ -3131,7 +3131,7 @@
                 </a:solidFill>
                 <a:latin typeface="Arial"/>
               </a:rPr>
-              <a:t>C1-E26 · Geometry definition and exact symmetry identity</a:t>
+              <a:t>C1-E26 · Bulk conservation and Newtonian constitutive assumption</a:t>
             </a:r>
           </a:p>
         </p:txBody>
@@ -3145,7 +3145,7 @@
         <p:spPr>
           <a:xfrm>
             <a:off x="365760" y="914400"/>
-            <a:ext cx="4023360" cy="4937760"/>
+            <a:ext cx="3840480" cy="4937760"/>
           </a:xfrm>
           <a:prstGeom prst="roundRect">
             <a:avLst/>
@@ -3177,7 +3177,7 @@
         <p:spPr>
           <a:xfrm>
             <a:off x="475488" y="969264"/>
-            <a:ext cx="3803904" cy="254889"/>
+            <a:ext cx="3621024" cy="254889"/>
           </a:xfrm>
           <a:prstGeom prst="rect">
             <a:avLst/>
@@ -3203,31 +3203,31 @@
                 </a:solidFill>
                 <a:latin typeface="Arial"/>
               </a:rPr>
-              <a:t>Perfect symmetry picks no direction</a:t>
-            </a:r>
-          </a:p>
-        </p:txBody>
-      </p:sp>
-      <p:sp>
-        <p:nvSpPr>
-          <p:cNvPr id="5" name="C1-E26 ellipse 3" descr="sci-ppt:o003"/>
+              <a:t>Continuity: ∇·u = 0</a:t>
+            </a:r>
+          </a:p>
+        </p:txBody>
+      </p:sp>
+      <p:sp>
+        <p:nvSpPr>
+          <p:cNvPr id="5" name="C1-E26 rect 3" descr="sci-ppt:o003"/>
           <p:cNvSpPr/>
           <p:nvPr/>
         </p:nvSpPr>
         <p:spPr>
           <a:xfrm>
-            <a:off x="1554480" y="2560320"/>
-            <a:ext cx="1645920" cy="1645920"/>
-          </a:xfrm>
-          <a:prstGeom prst="ellipse">
+            <a:off x="1280160" y="2286000"/>
+            <a:ext cx="2011680" cy="1554480"/>
+          </a:xfrm>
+          <a:prstGeom prst="rect">
             <a:avLst/>
           </a:prstGeom>
           <a:solidFill>
-            <a:srgbClr val="0C1820"/>
+            <a:srgbClr val="1E4A5A"/>
           </a:solidFill>
-          <a:ln w="27940">
+          <a:ln w="25400">
             <a:solidFill>
-              <a:srgbClr val="F2B880"/>
+              <a:srgbClr val="8EDBD4"/>
             </a:solidFill>
           </a:ln>
           <a:effectLst/>
@@ -3248,13 +3248,13 @@
         </p:nvCxnSpPr>
         <p:spPr>
           <a:xfrm>
-            <a:off x="3246120" y="3383280"/>
+            <a:off x="685800" y="2606040"/>
             <a:ext cx="548640" cy="0"/>
           </a:xfrm>
           <a:prstGeom prst="line">
             <a:avLst/>
           </a:prstGeom>
-          <a:ln w="30480">
+          <a:ln w="33020">
             <a:solidFill>
               <a:srgbClr val="8EDBD4"/>
             </a:solidFill>
@@ -3271,14 +3271,14 @@
           <p:nvPr/>
         </p:nvCxnSpPr>
         <p:spPr>
-          <a:xfrm flipV="1">
-            <a:off x="3129738" y="2674620"/>
-            <a:ext cx="475137" cy="274320"/>
+          <a:xfrm>
+            <a:off x="3337560" y="2606040"/>
+            <a:ext cx="548640" cy="0"/>
           </a:xfrm>
           <a:prstGeom prst="line">
             <a:avLst/>
           </a:prstGeom>
-          <a:ln w="30480">
+          <a:ln w="33020">
             <a:solidFill>
               <a:srgbClr val="8EDBD4"/>
             </a:solidFill>
@@ -3295,14 +3295,14 @@
           <p:nvPr/>
         </p:nvCxnSpPr>
         <p:spPr>
-          <a:xfrm flipV="1">
-            <a:off x="2811780" y="2155844"/>
-            <a:ext cx="274320" cy="475137"/>
+          <a:xfrm>
+            <a:off x="685800" y="3063240"/>
+            <a:ext cx="548640" cy="0"/>
           </a:xfrm>
           <a:prstGeom prst="line">
             <a:avLst/>
           </a:prstGeom>
-          <a:ln w="30480">
+          <a:ln w="33020">
             <a:solidFill>
               <a:srgbClr val="8EDBD4"/>
             </a:solidFill>
@@ -3319,14 +3319,14 @@
           <p:nvPr/>
         </p:nvCxnSpPr>
         <p:spPr>
-          <a:xfrm flipV="1">
-            <a:off x="2377440" y="1965960"/>
-            <a:ext cx="0" cy="548640"/>
+          <a:xfrm>
+            <a:off x="3337560" y="3063240"/>
+            <a:ext cx="548640" cy="0"/>
           </a:xfrm>
           <a:prstGeom prst="line">
             <a:avLst/>
           </a:prstGeom>
-          <a:ln w="30480">
+          <a:ln w="33020">
             <a:solidFill>
               <a:srgbClr val="8EDBD4"/>
             </a:solidFill>
@@ -3343,14 +3343,14 @@
           <p:nvPr/>
         </p:nvCxnSpPr>
         <p:spPr>
-          <a:xfrm flipH="1" flipV="1">
-            <a:off x="1668780" y="2155844"/>
-            <a:ext cx="274320" cy="475137"/>
+          <a:xfrm>
+            <a:off x="685800" y="3520440"/>
+            <a:ext cx="548640" cy="0"/>
           </a:xfrm>
           <a:prstGeom prst="line">
             <a:avLst/>
           </a:prstGeom>
-          <a:ln w="30480">
+          <a:ln w="33020">
             <a:solidFill>
               <a:srgbClr val="8EDBD4"/>
             </a:solidFill>
@@ -3367,14 +3367,14 @@
           <p:nvPr/>
         </p:nvCxnSpPr>
         <p:spPr>
-          <a:xfrm flipH="1" flipV="1">
-            <a:off x="1150004" y="2674620"/>
-            <a:ext cx="475137" cy="274320"/>
+          <a:xfrm>
+            <a:off x="3337560" y="3520440"/>
+            <a:ext cx="548640" cy="0"/>
           </a:xfrm>
           <a:prstGeom prst="line">
             <a:avLst/>
           </a:prstGeom>
-          <a:ln w="30480">
+          <a:ln w="33020">
             <a:solidFill>
               <a:srgbClr val="8EDBD4"/>
             </a:solidFill>
@@ -3384,21 +3384,221 @@
           <a:effectLst/>
         </p:spPr>
       </p:cxnSp>
+      <p:sp>
+        <p:nvSpPr>
+          <p:cNvPr id="12" name="C1-E26 text 10" descr="sci-ppt:o010"/>
+          <p:cNvSpPr txBox="1"/>
+          <p:nvPr/>
+        </p:nvSpPr>
+        <p:spPr>
+          <a:xfrm>
+            <a:off x="1371600" y="2834640"/>
+            <a:ext cx="1828800" cy="448563"/>
+          </a:xfrm>
+          <a:prstGeom prst="rect">
+            <a:avLst/>
+          </a:prstGeom>
+          <a:noFill/>
+          <a:effectLst/>
+        </p:spPr>
+        <p:txBody>
+          <a:bodyPr wrap="none" lIns="18288" rIns="18288" tIns="18288" bIns="18288" anchor="t">
+            <a:spAutoFit/>
+          </a:bodyPr>
+          <a:lstStyle/>
+          <a:p>
+            <a:pPr algn="ctr">
+              <a:spcAft>
+                <a:spcPts val="0"/>
+              </a:spcAft>
+            </a:pPr>
+            <a:r>
+              <a:rPr sz="1300" b="1" i="0">
+                <a:solidFill>
+                  <a:srgbClr val="E7F0F3"/>
+                </a:solidFill>
+                <a:latin typeface="Arial"/>
+              </a:rPr>
+              <a:t>volume in</a:t>
+            </a:r>
+          </a:p>
+          <a:p>
+            <a:pPr algn="ctr">
+              <a:spcAft>
+                <a:spcPts val="0"/>
+              </a:spcAft>
+            </a:pPr>
+            <a:r>
+              <a:rPr sz="1300" b="1" i="0">
+                <a:solidFill>
+                  <a:srgbClr val="E7F0F3"/>
+                </a:solidFill>
+                <a:latin typeface="Arial"/>
+              </a:rPr>
+              <a:t>= volume out</a:t>
+            </a:r>
+          </a:p>
+        </p:txBody>
+      </p:sp>
+      <p:sp>
+        <p:nvSpPr>
+          <p:cNvPr id="13" name="C1-E26 text 11" descr="sci-ppt:o011"/>
+          <p:cNvSpPr txBox="1"/>
+          <p:nvPr/>
+        </p:nvSpPr>
+        <p:spPr>
+          <a:xfrm>
+            <a:off x="502920" y="4251960"/>
+            <a:ext cx="3566160" cy="626745"/>
+          </a:xfrm>
+          <a:prstGeom prst="rect">
+            <a:avLst/>
+          </a:prstGeom>
+          <a:noFill/>
+          <a:effectLst/>
+        </p:spPr>
+        <p:txBody>
+          <a:bodyPr wrap="none" lIns="18288" rIns="18288" tIns="18288" bIns="18288" anchor="t">
+            <a:spAutoFit/>
+          </a:bodyPr>
+          <a:lstStyle/>
+          <a:p>
+            <a:pPr algn="l">
+              <a:spcAft>
+                <a:spcPts val="0"/>
+              </a:spcAft>
+            </a:pPr>
+            <a:r>
+              <a:rPr sz="1250" b="0" i="0">
+                <a:solidFill>
+                  <a:srgbClr val="E7F0F3"/>
+                </a:solidFill>
+                <a:latin typeface="Arial"/>
+              </a:rPr>
+              <a:t>The liquid does not compress: whatever</a:t>
+            </a:r>
+          </a:p>
+          <a:p>
+            <a:pPr algn="l">
+              <a:spcAft>
+                <a:spcPts val="0"/>
+              </a:spcAft>
+            </a:pPr>
+            <a:r>
+              <a:rPr sz="1250" b="0" i="0">
+                <a:solidFill>
+                  <a:srgbClr val="E7F0F3"/>
+                </a:solidFill>
+                <a:latin typeface="Arial"/>
+              </a:rPr>
+              <a:t>flows into a region flows out, so a moving</a:t>
+            </a:r>
+          </a:p>
+          <a:p>
+            <a:pPr algn="l">
+              <a:spcAft>
+                <a:spcPts val="0"/>
+              </a:spcAft>
+            </a:pPr>
+            <a:r>
+              <a:rPr sz="1250" b="0" i="0">
+                <a:solidFill>
+                  <a:srgbClr val="E7F0F3"/>
+                </a:solidFill>
+                <a:latin typeface="Arial"/>
+              </a:rPr>
+              <a:t>bubble wall must push liquid outward.</a:t>
+            </a:r>
+          </a:p>
+        </p:txBody>
+      </p:sp>
+      <p:sp>
+        <p:nvSpPr>
+          <p:cNvPr id="14" name="C1-E26 round_rect 12" descr="sci-ppt:o012"/>
+          <p:cNvSpPr/>
+          <p:nvPr/>
+        </p:nvSpPr>
+        <p:spPr>
+          <a:xfrm>
+            <a:off x="4480560" y="914400"/>
+            <a:ext cx="7360920" cy="4937760"/>
+          </a:xfrm>
+          <a:prstGeom prst="roundRect">
+            <a:avLst/>
+          </a:prstGeom>
+          <a:solidFill>
+            <a:srgbClr val="213E4B"/>
+          </a:solidFill>
+          <a:ln w="20320">
+            <a:solidFill>
+              <a:srgbClr val="8EDBD4"/>
+            </a:solidFill>
+          </a:ln>
+          <a:effectLst/>
+        </p:spPr>
+        <p:txBody>
+          <a:bodyPr rtlCol="0" anchor="ctr"/>
+          <a:lstStyle/>
+          <a:p>
+            <a:pPr algn="ctr"/>
+          </a:p>
+        </p:txBody>
+      </p:sp>
+      <p:sp>
+        <p:nvSpPr>
+          <p:cNvPr id="15" name="C1-E26 text 13" descr="sci-ppt:o013"/>
+          <p:cNvSpPr txBox="1"/>
+          <p:nvPr/>
+        </p:nvSpPr>
+        <p:spPr>
+          <a:xfrm>
+            <a:off x="4590288" y="969264"/>
+            <a:ext cx="7141464" cy="254889"/>
+          </a:xfrm>
+          <a:prstGeom prst="rect">
+            <a:avLst/>
+          </a:prstGeom>
+          <a:noFill/>
+          <a:effectLst/>
+        </p:spPr>
+        <p:txBody>
+          <a:bodyPr wrap="none" lIns="18288" rIns="18288" tIns="18288" bIns="18288" anchor="t">
+            <a:spAutoFit/>
+          </a:bodyPr>
+          <a:lstStyle/>
+          <a:p>
+            <a:pPr algn="l">
+              <a:spcAft>
+                <a:spcPts val="0"/>
+              </a:spcAft>
+            </a:pPr>
+            <a:r>
+              <a:rPr sz="1350" b="1" i="0">
+                <a:solidFill>
+                  <a:srgbClr val="8EDBD4"/>
+                </a:solidFill>
+                <a:latin typeface="Arial"/>
+              </a:rPr>
+              <a:t>Momentum: ρ Du/Dt = −∇p + μ∇²u</a:t>
+            </a:r>
+          </a:p>
+        </p:txBody>
+      </p:sp>
       <p:cxnSp>
         <p:nvCxnSpPr>
-          <p:cNvPr id="12" name="C1-E26 arrow 10" descr="sci-ppt:o010"/>
+          <p:cNvPr id="16" name="C1-E26 arrow 14" descr="sci-ppt:o014"/>
           <p:cNvCxnSpPr/>
           <p:nvPr/>
         </p:nvCxnSpPr>
         <p:spPr>
-          <a:xfrm flipH="1">
-            <a:off x="960120" y="3383280"/>
-            <a:ext cx="548640" cy="0"/>
+          <a:xfrm flipV="1">
+            <a:off x="5394960" y="3474720"/>
+            <a:ext cx="2743200" cy="914400"/>
           </a:xfrm>
           <a:prstGeom prst="line">
             <a:avLst/>
           </a:prstGeom>
-          <a:ln w="30480">
+          <a:ln w="44450">
             <a:solidFill>
               <a:srgbClr val="8EDBD4"/>
             </a:solidFill>
@@ -3410,21 +3610,21 @@
       </p:cxnSp>
       <p:cxnSp>
         <p:nvCxnSpPr>
-          <p:cNvPr id="13" name="C1-E26 arrow 11" descr="sci-ppt:o011"/>
+          <p:cNvPr id="17" name="C1-E26 arrow 15" descr="sci-ppt:o015"/>
           <p:cNvCxnSpPr/>
           <p:nvPr/>
         </p:nvCxnSpPr>
         <p:spPr>
-          <a:xfrm flipH="1">
-            <a:off x="1150004" y="3817620"/>
-            <a:ext cx="475137" cy="274319"/>
+          <a:xfrm>
+            <a:off x="5394960" y="4389120"/>
+            <a:ext cx="2743200" cy="0"/>
           </a:xfrm>
           <a:prstGeom prst="line">
             <a:avLst/>
           </a:prstGeom>
-          <a:ln w="30480">
+          <a:ln w="38100">
             <a:solidFill>
-              <a:srgbClr val="8EDBD4"/>
+              <a:srgbClr val="F28BA0"/>
             </a:solidFill>
             <a:headEnd type="none" w="med" len="med"/>
             <a:tailEnd type="triangle" w="med" len="med"/>
@@ -3434,21 +3634,21 @@
       </p:cxnSp>
       <p:cxnSp>
         <p:nvCxnSpPr>
-          <p:cNvPr id="14" name="C1-E26 arrow 12" descr="sci-ppt:o012"/>
+          <p:cNvPr id="18" name="C1-E26 arrow 16" descr="sci-ppt:o016"/>
           <p:cNvCxnSpPr/>
           <p:nvPr/>
         </p:nvCxnSpPr>
         <p:spPr>
-          <a:xfrm flipH="1">
-            <a:off x="1668779" y="4135578"/>
-            <a:ext cx="274320" cy="475137"/>
+          <a:xfrm flipV="1">
+            <a:off x="8138160" y="3474720"/>
+            <a:ext cx="0" cy="914400"/>
           </a:xfrm>
           <a:prstGeom prst="line">
             <a:avLst/>
           </a:prstGeom>
-          <a:ln w="30480">
+          <a:ln w="38100">
             <a:solidFill>
-              <a:srgbClr val="8EDBD4"/>
+              <a:srgbClr val="7FC8F8"/>
             </a:solidFill>
             <a:headEnd type="none" w="med" len="med"/>
             <a:tailEnd type="triangle" w="med" len="med"/>
@@ -3456,88 +3656,48 @@
           <a:effectLst/>
         </p:spPr>
       </p:cxnSp>
-      <p:cxnSp>
-        <p:nvCxnSpPr>
-          <p:cNvPr id="15" name="C1-E26 arrow 13" descr="sci-ppt:o013"/>
-          <p:cNvCxnSpPr/>
+      <p:sp>
+        <p:nvSpPr>
+          <p:cNvPr id="19" name="C1-E26 ellipse 17" descr="sci-ppt:o017"/>
+          <p:cNvSpPr/>
           <p:nvPr/>
-        </p:nvCxnSpPr>
-        <p:spPr>
-          <a:xfrm flipH="1">
-            <a:off x="2377439" y="4251960"/>
-            <a:ext cx="1" cy="548640"/>
-          </a:xfrm>
-          <a:prstGeom prst="line">
+        </p:nvSpPr>
+        <p:spPr>
+          <a:xfrm>
+            <a:off x="5321808" y="4315968"/>
+            <a:ext cx="146304" cy="146304"/>
+          </a:xfrm>
+          <a:prstGeom prst="ellipse">
             <a:avLst/>
           </a:prstGeom>
-          <a:ln w="30480">
+          <a:solidFill>
+            <a:srgbClr val="E7F0F3"/>
+          </a:solidFill>
+          <a:ln w="12700">
             <a:solidFill>
-              <a:srgbClr val="8EDBD4"/>
+              <a:srgbClr val="E7F0F3"/>
             </a:solidFill>
-            <a:headEnd type="none" w="med" len="med"/>
-            <a:tailEnd type="triangle" w="med" len="med"/>
           </a:ln>
           <a:effectLst/>
         </p:spPr>
-      </p:cxnSp>
-      <p:cxnSp>
-        <p:nvCxnSpPr>
-          <p:cNvPr id="16" name="C1-E26 arrow 14" descr="sci-ppt:o014"/>
-          <p:cNvCxnSpPr/>
-          <p:nvPr/>
-        </p:nvCxnSpPr>
-        <p:spPr>
-          <a:xfrm>
-            <a:off x="2811780" y="4135578"/>
-            <a:ext cx="274320" cy="475137"/>
-          </a:xfrm>
-          <a:prstGeom prst="line">
-            <a:avLst/>
-          </a:prstGeom>
-          <a:ln w="30480">
-            <a:solidFill>
-              <a:srgbClr val="8EDBD4"/>
-            </a:solidFill>
-            <a:headEnd type="none" w="med" len="med"/>
-            <a:tailEnd type="triangle" w="med" len="med"/>
-          </a:ln>
-          <a:effectLst/>
-        </p:spPr>
-      </p:cxnSp>
-      <p:cxnSp>
-        <p:nvCxnSpPr>
-          <p:cNvPr id="17" name="C1-E26 arrow 15" descr="sci-ppt:o015"/>
-          <p:cNvCxnSpPr/>
-          <p:nvPr/>
-        </p:nvCxnSpPr>
-        <p:spPr>
-          <a:xfrm>
-            <a:off x="3129738" y="3817620"/>
-            <a:ext cx="475137" cy="274320"/>
-          </a:xfrm>
-          <a:prstGeom prst="line">
-            <a:avLst/>
-          </a:prstGeom>
-          <a:ln w="30480">
-            <a:solidFill>
-              <a:srgbClr val="8EDBD4"/>
-            </a:solidFill>
-            <a:headEnd type="none" w="med" len="med"/>
-            <a:tailEnd type="triangle" w="med" len="med"/>
-          </a:ln>
-          <a:effectLst/>
-        </p:spPr>
-      </p:cxnSp>
-      <p:sp>
-        <p:nvSpPr>
-          <p:cNvPr id="18" name="C1-E26 text 16" descr="sci-ppt:o016"/>
+        <p:txBody>
+          <a:bodyPr rtlCol="0" anchor="ctr"/>
+          <a:lstStyle/>
+          <a:p>
+            <a:pPr algn="ctr"/>
+          </a:p>
+        </p:txBody>
+      </p:sp>
+      <p:sp>
+        <p:nvSpPr>
+          <p:cNvPr id="20" name="C1-E26 text 18" descr="sci-ppt:o018"/>
           <p:cNvSpPr txBox="1"/>
           <p:nvPr/>
         </p:nvSpPr>
         <p:spPr>
           <a:xfrm>
-            <a:off x="502920" y="5029200"/>
-            <a:ext cx="3749039" cy="626745"/>
+            <a:off x="8275320" y="3108960"/>
+            <a:ext cx="3291840" cy="247142"/>
           </a:xfrm>
           <a:prstGeom prst="rect">
             <a:avLst/>
@@ -3557,13 +3717,133 @@
               </a:spcAft>
             </a:pPr>
             <a:r>
-              <a:rPr sz="1250" b="0" i="0">
+              <a:rPr sz="1300" b="1" i="0">
+                <a:solidFill>
+                  <a:srgbClr val="8EDBD4"/>
+                </a:solidFill>
+                <a:latin typeface="Arial"/>
+              </a:rPr>
+              <a:t>ρ Du/Dt (inertia)</a:t>
+            </a:r>
+          </a:p>
+        </p:txBody>
+      </p:sp>
+      <p:sp>
+        <p:nvSpPr>
+          <p:cNvPr id="21" name="C1-E26 text 19" descr="sci-ppt:o019"/>
+          <p:cNvSpPr txBox="1"/>
+          <p:nvPr/>
+        </p:nvSpPr>
+        <p:spPr>
+          <a:xfrm>
+            <a:off x="6309360" y="4462272"/>
+            <a:ext cx="2743200" cy="247142"/>
+          </a:xfrm>
+          <a:prstGeom prst="rect">
+            <a:avLst/>
+          </a:prstGeom>
+          <a:noFill/>
+          <a:effectLst/>
+        </p:spPr>
+        <p:txBody>
+          <a:bodyPr wrap="none" lIns="18288" rIns="18288" tIns="18288" bIns="18288" anchor="t">
+            <a:spAutoFit/>
+          </a:bodyPr>
+          <a:lstStyle/>
+          <a:p>
+            <a:pPr algn="l">
+              <a:spcAft>
+                <a:spcPts val="0"/>
+              </a:spcAft>
+            </a:pPr>
+            <a:r>
+              <a:rPr sz="1300" b="1" i="0">
+                <a:solidFill>
+                  <a:srgbClr val="F28BA0"/>
+                </a:solidFill>
+                <a:latin typeface="Arial"/>
+              </a:rPr>
+              <a:t>−∇p (pressure gradient)</a:t>
+            </a:r>
+          </a:p>
+        </p:txBody>
+      </p:sp>
+      <p:sp>
+        <p:nvSpPr>
+          <p:cNvPr id="22" name="C1-E26 text 20" descr="sci-ppt:o020"/>
+          <p:cNvSpPr txBox="1"/>
+          <p:nvPr/>
+        </p:nvSpPr>
+        <p:spPr>
+          <a:xfrm>
+            <a:off x="8275320" y="3840480"/>
+            <a:ext cx="3291840" cy="247142"/>
+          </a:xfrm>
+          <a:prstGeom prst="rect">
+            <a:avLst/>
+          </a:prstGeom>
+          <a:noFill/>
+          <a:effectLst/>
+        </p:spPr>
+        <p:txBody>
+          <a:bodyPr wrap="none" lIns="18288" rIns="18288" tIns="18288" bIns="18288" anchor="t">
+            <a:spAutoFit/>
+          </a:bodyPr>
+          <a:lstStyle/>
+          <a:p>
+            <a:pPr algn="l">
+              <a:spcAft>
+                <a:spcPts val="0"/>
+              </a:spcAft>
+            </a:pPr>
+            <a:r>
+              <a:rPr sz="1300" b="1" i="0">
+                <a:solidFill>
+                  <a:srgbClr val="7FC8F8"/>
+                </a:solidFill>
+                <a:latin typeface="Arial"/>
+              </a:rPr>
+              <a:t>μ∇²u (viscous diffusion)</a:t>
+            </a:r>
+          </a:p>
+        </p:txBody>
+      </p:sp>
+      <p:sp>
+        <p:nvSpPr>
+          <p:cNvPr id="23" name="C1-E26 text 21" descr="sci-ppt:o021"/>
+          <p:cNvSpPr txBox="1"/>
+          <p:nvPr/>
+        </p:nvSpPr>
+        <p:spPr>
+          <a:xfrm>
+            <a:off x="4663440" y="1371600"/>
+            <a:ext cx="7040880" cy="448563"/>
+          </a:xfrm>
+          <a:prstGeom prst="rect">
+            <a:avLst/>
+          </a:prstGeom>
+          <a:noFill/>
+          <a:effectLst/>
+        </p:spPr>
+        <p:txBody>
+          <a:bodyPr wrap="none" lIns="18288" rIns="18288" tIns="18288" bIns="18288" anchor="t">
+            <a:spAutoFit/>
+          </a:bodyPr>
+          <a:lstStyle/>
+          <a:p>
+            <a:pPr algn="l">
+              <a:spcAft>
+                <a:spcPts val="0"/>
+              </a:spcAft>
+            </a:pPr>
+            <a:r>
+              <a:rPr sz="1300" b="0" i="0">
                 <a:solidFill>
                   <a:srgbClr val="E7F0F3"/>
                 </a:solidFill>
                 <a:latin typeface="Arial"/>
               </a:rPr>
-              <a:t>∮ eᵣ dΩ = 0: outward unit vectors cancel in</a:t>
+              <a:t>Per unit volume, the mass-times-acceleration vector equals the sum of the</a:t>
             </a:r>
           </a:p>
           <a:p>
@@ -3573,15 +3853,39 @@
               </a:spcAft>
             </a:pPr>
             <a:r>
-              <a:rPr sz="1250" b="0" i="0">
+              <a:rPr sz="1300" b="0" i="0">
                 <a:solidFill>
                   <a:srgbClr val="E7F0F3"/>
                 </a:solidFill>
                 <a:latin typeface="Arial"/>
               </a:rPr>
-              <a:t>pairs, so a lone sphere has no preferred jet</a:t>
-            </a:r>
-          </a:p>
+              <a:t>forces:</a:t>
+            </a:r>
+          </a:p>
+        </p:txBody>
+      </p:sp>
+      <p:sp>
+        <p:nvSpPr>
+          <p:cNvPr id="24" name="C1-E26 text 22" descr="sci-ppt:o022"/>
+          <p:cNvSpPr txBox="1"/>
+          <p:nvPr/>
+        </p:nvSpPr>
+        <p:spPr>
+          <a:xfrm>
+            <a:off x="4663440" y="1874519"/>
+            <a:ext cx="7040880" cy="626745"/>
+          </a:xfrm>
+          <a:prstGeom prst="rect">
+            <a:avLst/>
+          </a:prstGeom>
+          <a:noFill/>
+          <a:effectLst/>
+        </p:spPr>
+        <p:txBody>
+          <a:bodyPr wrap="none" lIns="18288" rIns="18288" tIns="18288" bIns="18288" anchor="t">
+            <a:spAutoFit/>
+          </a:bodyPr>
+          <a:lstStyle/>
           <a:p>
             <a:pPr algn="l">
               <a:spcAft>
@@ -3591,716 +3895,56 @@
             <a:r>
               <a:rPr sz="1250" b="0" i="0">
                 <a:solidFill>
-                  <a:srgbClr val="E7F0F3"/>
+                  <a:srgbClr val="B4C7D2"/>
                 </a:solidFill>
                 <a:latin typeface="Arial"/>
               </a:rPr>
-              <a:t>direction.</a:t>
-            </a:r>
-          </a:p>
-        </p:txBody>
-      </p:sp>
-      <p:sp>
-        <p:nvSpPr>
-          <p:cNvPr id="19" name="C1-E26 rect 17" descr="sci-ppt:o017"/>
-          <p:cNvSpPr/>
-          <p:nvPr/>
-        </p:nvSpPr>
-        <p:spPr>
-          <a:xfrm>
-            <a:off x="4754880" y="5486400"/>
-            <a:ext cx="7040880" cy="256032"/>
-          </a:xfrm>
-          <a:prstGeom prst="rect">
-            <a:avLst/>
-          </a:prstGeom>
-          <a:solidFill>
-            <a:srgbClr val="3A5362"/>
-          </a:solidFill>
-          <a:ln w="16510">
-            <a:solidFill>
-              <a:srgbClr val="B4C7D2"/>
-            </a:solidFill>
-          </a:ln>
-          <a:effectLst/>
-        </p:spPr>
-        <p:txBody>
-          <a:bodyPr rtlCol="0" anchor="ctr"/>
-          <a:lstStyle/>
-          <a:p>
-            <a:pPr algn="ctr"/>
-          </a:p>
-        </p:txBody>
-      </p:sp>
-      <p:cxnSp>
-        <p:nvCxnSpPr>
-          <p:cNvPr id="20" name="C1-E26 line 18" descr="sci-ppt:o018"/>
-          <p:cNvCxnSpPr/>
-          <p:nvPr/>
-        </p:nvCxnSpPr>
-        <p:spPr>
-          <a:xfrm>
-            <a:off x="4846320" y="5742432"/>
-            <a:ext cx="137160" cy="155448"/>
-          </a:xfrm>
-          <a:prstGeom prst="line">
-            <a:avLst/>
-          </a:prstGeom>
-          <a:ln w="12700">
-            <a:solidFill>
-              <a:srgbClr val="B4C7D2"/>
-            </a:solidFill>
-          </a:ln>
-          <a:effectLst/>
-        </p:spPr>
-      </p:cxnSp>
-      <p:cxnSp>
-        <p:nvCxnSpPr>
-          <p:cNvPr id="21" name="C1-E26 line 19" descr="sci-ppt:o019"/>
-          <p:cNvCxnSpPr/>
-          <p:nvPr/>
-        </p:nvCxnSpPr>
-        <p:spPr>
-          <a:xfrm>
-            <a:off x="5074920" y="5742432"/>
-            <a:ext cx="137160" cy="155448"/>
-          </a:xfrm>
-          <a:prstGeom prst="line">
-            <a:avLst/>
-          </a:prstGeom>
-          <a:ln w="12700">
-            <a:solidFill>
-              <a:srgbClr val="B4C7D2"/>
-            </a:solidFill>
-          </a:ln>
-          <a:effectLst/>
-        </p:spPr>
-      </p:cxnSp>
-      <p:cxnSp>
-        <p:nvCxnSpPr>
-          <p:cNvPr id="22" name="C1-E26 line 20" descr="sci-ppt:o020"/>
-          <p:cNvCxnSpPr/>
-          <p:nvPr/>
-        </p:nvCxnSpPr>
-        <p:spPr>
-          <a:xfrm>
-            <a:off x="5303520" y="5742432"/>
-            <a:ext cx="137160" cy="155448"/>
-          </a:xfrm>
-          <a:prstGeom prst="line">
-            <a:avLst/>
-          </a:prstGeom>
-          <a:ln w="12700">
-            <a:solidFill>
-              <a:srgbClr val="B4C7D2"/>
-            </a:solidFill>
-          </a:ln>
-          <a:effectLst/>
-        </p:spPr>
-      </p:cxnSp>
-      <p:cxnSp>
-        <p:nvCxnSpPr>
-          <p:cNvPr id="23" name="C1-E26 line 21" descr="sci-ppt:o021"/>
-          <p:cNvCxnSpPr/>
-          <p:nvPr/>
-        </p:nvCxnSpPr>
-        <p:spPr>
-          <a:xfrm>
-            <a:off x="5532120" y="5742432"/>
-            <a:ext cx="137160" cy="155448"/>
-          </a:xfrm>
-          <a:prstGeom prst="line">
-            <a:avLst/>
-          </a:prstGeom>
-          <a:ln w="12700">
-            <a:solidFill>
-              <a:srgbClr val="B4C7D2"/>
-            </a:solidFill>
-          </a:ln>
-          <a:effectLst/>
-        </p:spPr>
-      </p:cxnSp>
-      <p:cxnSp>
-        <p:nvCxnSpPr>
-          <p:cNvPr id="24" name="C1-E26 line 22" descr="sci-ppt:o022"/>
-          <p:cNvCxnSpPr/>
-          <p:nvPr/>
-        </p:nvCxnSpPr>
-        <p:spPr>
-          <a:xfrm>
-            <a:off x="5760720" y="5742432"/>
-            <a:ext cx="137160" cy="155448"/>
-          </a:xfrm>
-          <a:prstGeom prst="line">
-            <a:avLst/>
-          </a:prstGeom>
-          <a:ln w="12700">
-            <a:solidFill>
-              <a:srgbClr val="B4C7D2"/>
-            </a:solidFill>
-          </a:ln>
-          <a:effectLst/>
-        </p:spPr>
-      </p:cxnSp>
-      <p:cxnSp>
-        <p:nvCxnSpPr>
-          <p:cNvPr id="25" name="C1-E26 line 23" descr="sci-ppt:o023"/>
-          <p:cNvCxnSpPr/>
-          <p:nvPr/>
-        </p:nvCxnSpPr>
-        <p:spPr>
-          <a:xfrm>
-            <a:off x="5989320" y="5742432"/>
-            <a:ext cx="137160" cy="155448"/>
-          </a:xfrm>
-          <a:prstGeom prst="line">
-            <a:avLst/>
-          </a:prstGeom>
-          <a:ln w="12700">
-            <a:solidFill>
-              <a:srgbClr val="B4C7D2"/>
-            </a:solidFill>
-          </a:ln>
-          <a:effectLst/>
-        </p:spPr>
-      </p:cxnSp>
-      <p:cxnSp>
-        <p:nvCxnSpPr>
-          <p:cNvPr id="26" name="C1-E26 line 24" descr="sci-ppt:o024"/>
-          <p:cNvCxnSpPr/>
-          <p:nvPr/>
-        </p:nvCxnSpPr>
-        <p:spPr>
-          <a:xfrm>
-            <a:off x="6217920" y="5742432"/>
-            <a:ext cx="137160" cy="155448"/>
-          </a:xfrm>
-          <a:prstGeom prst="line">
-            <a:avLst/>
-          </a:prstGeom>
-          <a:ln w="12700">
-            <a:solidFill>
-              <a:srgbClr val="B4C7D2"/>
-            </a:solidFill>
-          </a:ln>
-          <a:effectLst/>
-        </p:spPr>
-      </p:cxnSp>
-      <p:cxnSp>
-        <p:nvCxnSpPr>
-          <p:cNvPr id="27" name="C1-E26 line 25" descr="sci-ppt:o025"/>
-          <p:cNvCxnSpPr/>
-          <p:nvPr/>
-        </p:nvCxnSpPr>
-        <p:spPr>
-          <a:xfrm>
-            <a:off x="6446520" y="5742432"/>
-            <a:ext cx="137160" cy="155448"/>
-          </a:xfrm>
-          <a:prstGeom prst="line">
-            <a:avLst/>
-          </a:prstGeom>
-          <a:ln w="12700">
-            <a:solidFill>
-              <a:srgbClr val="B4C7D2"/>
-            </a:solidFill>
-          </a:ln>
-          <a:effectLst/>
-        </p:spPr>
-      </p:cxnSp>
-      <p:cxnSp>
-        <p:nvCxnSpPr>
-          <p:cNvPr id="28" name="C1-E26 line 26" descr="sci-ppt:o026"/>
-          <p:cNvCxnSpPr/>
-          <p:nvPr/>
-        </p:nvCxnSpPr>
-        <p:spPr>
-          <a:xfrm>
-            <a:off x="6675120" y="5742432"/>
-            <a:ext cx="137160" cy="155448"/>
-          </a:xfrm>
-          <a:prstGeom prst="line">
-            <a:avLst/>
-          </a:prstGeom>
-          <a:ln w="12700">
-            <a:solidFill>
-              <a:srgbClr val="B4C7D2"/>
-            </a:solidFill>
-          </a:ln>
-          <a:effectLst/>
-        </p:spPr>
-      </p:cxnSp>
-      <p:cxnSp>
-        <p:nvCxnSpPr>
-          <p:cNvPr id="29" name="C1-E26 line 27" descr="sci-ppt:o027"/>
-          <p:cNvCxnSpPr/>
-          <p:nvPr/>
-        </p:nvCxnSpPr>
-        <p:spPr>
-          <a:xfrm>
-            <a:off x="6903720" y="5742432"/>
-            <a:ext cx="137160" cy="155448"/>
-          </a:xfrm>
-          <a:prstGeom prst="line">
-            <a:avLst/>
-          </a:prstGeom>
-          <a:ln w="12700">
-            <a:solidFill>
-              <a:srgbClr val="B4C7D2"/>
-            </a:solidFill>
-          </a:ln>
-          <a:effectLst/>
-        </p:spPr>
-      </p:cxnSp>
-      <p:cxnSp>
-        <p:nvCxnSpPr>
-          <p:cNvPr id="30" name="C1-E26 line 28" descr="sci-ppt:o028"/>
-          <p:cNvCxnSpPr/>
-          <p:nvPr/>
-        </p:nvCxnSpPr>
-        <p:spPr>
-          <a:xfrm>
-            <a:off x="7132320" y="5742432"/>
-            <a:ext cx="137160" cy="155448"/>
-          </a:xfrm>
-          <a:prstGeom prst="line">
-            <a:avLst/>
-          </a:prstGeom>
-          <a:ln w="12700">
-            <a:solidFill>
-              <a:srgbClr val="B4C7D2"/>
-            </a:solidFill>
-          </a:ln>
-          <a:effectLst/>
-        </p:spPr>
-      </p:cxnSp>
-      <p:cxnSp>
-        <p:nvCxnSpPr>
-          <p:cNvPr id="31" name="C1-E26 line 29" descr="sci-ppt:o029"/>
-          <p:cNvCxnSpPr/>
-          <p:nvPr/>
-        </p:nvCxnSpPr>
-        <p:spPr>
-          <a:xfrm>
-            <a:off x="7360920" y="5742432"/>
-            <a:ext cx="137159" cy="155448"/>
-          </a:xfrm>
-          <a:prstGeom prst="line">
-            <a:avLst/>
-          </a:prstGeom>
-          <a:ln w="12700">
-            <a:solidFill>
-              <a:srgbClr val="B4C7D2"/>
-            </a:solidFill>
-          </a:ln>
-          <a:effectLst/>
-        </p:spPr>
-      </p:cxnSp>
-      <p:cxnSp>
-        <p:nvCxnSpPr>
-          <p:cNvPr id="32" name="C1-E26 line 30" descr="sci-ppt:o030"/>
-          <p:cNvCxnSpPr/>
-          <p:nvPr/>
-        </p:nvCxnSpPr>
-        <p:spPr>
-          <a:xfrm>
-            <a:off x="7589520" y="5742432"/>
-            <a:ext cx="137159" cy="155448"/>
-          </a:xfrm>
-          <a:prstGeom prst="line">
-            <a:avLst/>
-          </a:prstGeom>
-          <a:ln w="12700">
-            <a:solidFill>
-              <a:srgbClr val="B4C7D2"/>
-            </a:solidFill>
-          </a:ln>
-          <a:effectLst/>
-        </p:spPr>
-      </p:cxnSp>
-      <p:cxnSp>
-        <p:nvCxnSpPr>
-          <p:cNvPr id="33" name="C1-E26 line 31" descr="sci-ppt:o031"/>
-          <p:cNvCxnSpPr/>
-          <p:nvPr/>
-        </p:nvCxnSpPr>
-        <p:spPr>
-          <a:xfrm>
-            <a:off x="7818120" y="5742432"/>
-            <a:ext cx="137159" cy="155448"/>
-          </a:xfrm>
-          <a:prstGeom prst="line">
-            <a:avLst/>
-          </a:prstGeom>
-          <a:ln w="12700">
-            <a:solidFill>
-              <a:srgbClr val="B4C7D2"/>
-            </a:solidFill>
-          </a:ln>
-          <a:effectLst/>
-        </p:spPr>
-      </p:cxnSp>
-      <p:cxnSp>
-        <p:nvCxnSpPr>
-          <p:cNvPr id="34" name="C1-E26 line 32" descr="sci-ppt:o032"/>
-          <p:cNvCxnSpPr/>
-          <p:nvPr/>
-        </p:nvCxnSpPr>
-        <p:spPr>
-          <a:xfrm>
-            <a:off x="8046720" y="5742432"/>
-            <a:ext cx="137159" cy="155448"/>
-          </a:xfrm>
-          <a:prstGeom prst="line">
-            <a:avLst/>
-          </a:prstGeom>
-          <a:ln w="12700">
-            <a:solidFill>
-              <a:srgbClr val="B4C7D2"/>
-            </a:solidFill>
-          </a:ln>
-          <a:effectLst/>
-        </p:spPr>
-      </p:cxnSp>
-      <p:cxnSp>
-        <p:nvCxnSpPr>
-          <p:cNvPr id="35" name="C1-E26 line 33" descr="sci-ppt:o033"/>
-          <p:cNvCxnSpPr/>
-          <p:nvPr/>
-        </p:nvCxnSpPr>
-        <p:spPr>
-          <a:xfrm>
-            <a:off x="8275320" y="5742432"/>
-            <a:ext cx="137160" cy="155448"/>
-          </a:xfrm>
-          <a:prstGeom prst="line">
-            <a:avLst/>
-          </a:prstGeom>
-          <a:ln w="12700">
-            <a:solidFill>
-              <a:srgbClr val="B4C7D2"/>
-            </a:solidFill>
-          </a:ln>
-          <a:effectLst/>
-        </p:spPr>
-      </p:cxnSp>
-      <p:cxnSp>
-        <p:nvCxnSpPr>
-          <p:cNvPr id="36" name="C1-E26 line 34" descr="sci-ppt:o034"/>
-          <p:cNvCxnSpPr/>
-          <p:nvPr/>
-        </p:nvCxnSpPr>
-        <p:spPr>
-          <a:xfrm>
-            <a:off x="8503920" y="5742432"/>
-            <a:ext cx="137160" cy="155448"/>
-          </a:xfrm>
-          <a:prstGeom prst="line">
-            <a:avLst/>
-          </a:prstGeom>
-          <a:ln w="12700">
-            <a:solidFill>
-              <a:srgbClr val="B4C7D2"/>
-            </a:solidFill>
-          </a:ln>
-          <a:effectLst/>
-        </p:spPr>
-      </p:cxnSp>
-      <p:cxnSp>
-        <p:nvCxnSpPr>
-          <p:cNvPr id="37" name="C1-E26 line 35" descr="sci-ppt:o035"/>
-          <p:cNvCxnSpPr/>
-          <p:nvPr/>
-        </p:nvCxnSpPr>
-        <p:spPr>
-          <a:xfrm>
-            <a:off x="8732520" y="5742432"/>
-            <a:ext cx="137160" cy="155448"/>
-          </a:xfrm>
-          <a:prstGeom prst="line">
-            <a:avLst/>
-          </a:prstGeom>
-          <a:ln w="12700">
-            <a:solidFill>
-              <a:srgbClr val="B4C7D2"/>
-            </a:solidFill>
-          </a:ln>
-          <a:effectLst/>
-        </p:spPr>
-      </p:cxnSp>
-      <p:cxnSp>
-        <p:nvCxnSpPr>
-          <p:cNvPr id="38" name="C1-E26 line 36" descr="sci-ppt:o036"/>
-          <p:cNvCxnSpPr/>
-          <p:nvPr/>
-        </p:nvCxnSpPr>
-        <p:spPr>
-          <a:xfrm>
-            <a:off x="8961120" y="5742432"/>
-            <a:ext cx="137160" cy="155448"/>
-          </a:xfrm>
-          <a:prstGeom prst="line">
-            <a:avLst/>
-          </a:prstGeom>
-          <a:ln w="12700">
-            <a:solidFill>
-              <a:srgbClr val="B4C7D2"/>
-            </a:solidFill>
-          </a:ln>
-          <a:effectLst/>
-        </p:spPr>
-      </p:cxnSp>
-      <p:cxnSp>
-        <p:nvCxnSpPr>
-          <p:cNvPr id="39" name="C1-E26 line 37" descr="sci-ppt:o037"/>
-          <p:cNvCxnSpPr/>
-          <p:nvPr/>
-        </p:nvCxnSpPr>
-        <p:spPr>
-          <a:xfrm>
-            <a:off x="9189720" y="5742432"/>
-            <a:ext cx="137160" cy="155448"/>
-          </a:xfrm>
-          <a:prstGeom prst="line">
-            <a:avLst/>
-          </a:prstGeom>
-          <a:ln w="12700">
-            <a:solidFill>
-              <a:srgbClr val="B4C7D2"/>
-            </a:solidFill>
-          </a:ln>
-          <a:effectLst/>
-        </p:spPr>
-      </p:cxnSp>
-      <p:cxnSp>
-        <p:nvCxnSpPr>
-          <p:cNvPr id="40" name="C1-E26 line 38" descr="sci-ppt:o038"/>
-          <p:cNvCxnSpPr/>
-          <p:nvPr/>
-        </p:nvCxnSpPr>
-        <p:spPr>
-          <a:xfrm>
-            <a:off x="9418320" y="5742432"/>
-            <a:ext cx="137160" cy="155448"/>
-          </a:xfrm>
-          <a:prstGeom prst="line">
-            <a:avLst/>
-          </a:prstGeom>
-          <a:ln w="12700">
-            <a:solidFill>
-              <a:srgbClr val="B4C7D2"/>
-            </a:solidFill>
-          </a:ln>
-          <a:effectLst/>
-        </p:spPr>
-      </p:cxnSp>
-      <p:cxnSp>
-        <p:nvCxnSpPr>
-          <p:cNvPr id="41" name="C1-E26 line 39" descr="sci-ppt:o039"/>
-          <p:cNvCxnSpPr/>
-          <p:nvPr/>
-        </p:nvCxnSpPr>
-        <p:spPr>
-          <a:xfrm>
-            <a:off x="9646920" y="5742432"/>
-            <a:ext cx="137160" cy="155448"/>
-          </a:xfrm>
-          <a:prstGeom prst="line">
-            <a:avLst/>
-          </a:prstGeom>
-          <a:ln w="12700">
-            <a:solidFill>
-              <a:srgbClr val="B4C7D2"/>
-            </a:solidFill>
-          </a:ln>
-          <a:effectLst/>
-        </p:spPr>
-      </p:cxnSp>
-      <p:cxnSp>
-        <p:nvCxnSpPr>
-          <p:cNvPr id="42" name="C1-E26 line 40" descr="sci-ppt:o040"/>
-          <p:cNvCxnSpPr/>
-          <p:nvPr/>
-        </p:nvCxnSpPr>
-        <p:spPr>
-          <a:xfrm>
-            <a:off x="9875520" y="5742432"/>
-            <a:ext cx="137160" cy="155448"/>
-          </a:xfrm>
-          <a:prstGeom prst="line">
-            <a:avLst/>
-          </a:prstGeom>
-          <a:ln w="12700">
-            <a:solidFill>
-              <a:srgbClr val="B4C7D2"/>
-            </a:solidFill>
-          </a:ln>
-          <a:effectLst/>
-        </p:spPr>
-      </p:cxnSp>
-      <p:cxnSp>
-        <p:nvCxnSpPr>
-          <p:cNvPr id="43" name="C1-E26 line 41" descr="sci-ppt:o041"/>
-          <p:cNvCxnSpPr/>
-          <p:nvPr/>
-        </p:nvCxnSpPr>
-        <p:spPr>
-          <a:xfrm>
-            <a:off x="10104120" y="5742432"/>
-            <a:ext cx="137160" cy="155448"/>
-          </a:xfrm>
-          <a:prstGeom prst="line">
-            <a:avLst/>
-          </a:prstGeom>
-          <a:ln w="12700">
-            <a:solidFill>
-              <a:srgbClr val="B4C7D2"/>
-            </a:solidFill>
-          </a:ln>
-          <a:effectLst/>
-        </p:spPr>
-      </p:cxnSp>
-      <p:cxnSp>
-        <p:nvCxnSpPr>
-          <p:cNvPr id="44" name="C1-E26 line 42" descr="sci-ppt:o042"/>
-          <p:cNvCxnSpPr/>
-          <p:nvPr/>
-        </p:nvCxnSpPr>
-        <p:spPr>
-          <a:xfrm>
-            <a:off x="10332720" y="5742432"/>
-            <a:ext cx="137160" cy="155448"/>
-          </a:xfrm>
-          <a:prstGeom prst="line">
-            <a:avLst/>
-          </a:prstGeom>
-          <a:ln w="12700">
-            <a:solidFill>
-              <a:srgbClr val="B4C7D2"/>
-            </a:solidFill>
-          </a:ln>
-          <a:effectLst/>
-        </p:spPr>
-      </p:cxnSp>
-      <p:cxnSp>
-        <p:nvCxnSpPr>
-          <p:cNvPr id="45" name="C1-E26 line 43" descr="sci-ppt:o043"/>
-          <p:cNvCxnSpPr/>
-          <p:nvPr/>
-        </p:nvCxnSpPr>
-        <p:spPr>
-          <a:xfrm>
-            <a:off x="10561320" y="5742432"/>
-            <a:ext cx="137160" cy="155448"/>
-          </a:xfrm>
-          <a:prstGeom prst="line">
-            <a:avLst/>
-          </a:prstGeom>
-          <a:ln w="12700">
-            <a:solidFill>
-              <a:srgbClr val="B4C7D2"/>
-            </a:solidFill>
-          </a:ln>
-          <a:effectLst/>
-        </p:spPr>
-      </p:cxnSp>
-      <p:cxnSp>
-        <p:nvCxnSpPr>
-          <p:cNvPr id="46" name="C1-E26 line 44" descr="sci-ppt:o044"/>
-          <p:cNvCxnSpPr/>
-          <p:nvPr/>
-        </p:nvCxnSpPr>
-        <p:spPr>
-          <a:xfrm>
-            <a:off x="10789920" y="5742432"/>
-            <a:ext cx="137160" cy="155448"/>
-          </a:xfrm>
-          <a:prstGeom prst="line">
-            <a:avLst/>
-          </a:prstGeom>
-          <a:ln w="12700">
-            <a:solidFill>
-              <a:srgbClr val="B4C7D2"/>
-            </a:solidFill>
-          </a:ln>
-          <a:effectLst/>
-        </p:spPr>
-      </p:cxnSp>
-      <p:cxnSp>
-        <p:nvCxnSpPr>
-          <p:cNvPr id="47" name="C1-E26 line 45" descr="sci-ppt:o045"/>
-          <p:cNvCxnSpPr/>
-          <p:nvPr/>
-        </p:nvCxnSpPr>
-        <p:spPr>
-          <a:xfrm>
-            <a:off x="11018520" y="5742432"/>
-            <a:ext cx="137160" cy="155448"/>
-          </a:xfrm>
-          <a:prstGeom prst="line">
-            <a:avLst/>
-          </a:prstGeom>
-          <a:ln w="12700">
-            <a:solidFill>
-              <a:srgbClr val="B4C7D2"/>
-            </a:solidFill>
-          </a:ln>
-          <a:effectLst/>
-        </p:spPr>
-      </p:cxnSp>
-      <p:cxnSp>
-        <p:nvCxnSpPr>
-          <p:cNvPr id="48" name="C1-E26 line 46" descr="sci-ppt:o046"/>
-          <p:cNvCxnSpPr/>
-          <p:nvPr/>
-        </p:nvCxnSpPr>
-        <p:spPr>
-          <a:xfrm>
-            <a:off x="11247120" y="5742432"/>
-            <a:ext cx="137160" cy="155448"/>
-          </a:xfrm>
-          <a:prstGeom prst="line">
-            <a:avLst/>
-          </a:prstGeom>
-          <a:ln w="12700">
-            <a:solidFill>
-              <a:srgbClr val="B4C7D2"/>
-            </a:solidFill>
-          </a:ln>
-          <a:effectLst/>
-        </p:spPr>
-      </p:cxnSp>
-      <p:cxnSp>
-        <p:nvCxnSpPr>
-          <p:cNvPr id="49" name="C1-E26 line 47" descr="sci-ppt:o047"/>
-          <p:cNvCxnSpPr/>
-          <p:nvPr/>
-        </p:nvCxnSpPr>
-        <p:spPr>
-          <a:xfrm>
-            <a:off x="11475720" y="5742432"/>
-            <a:ext cx="137160" cy="155448"/>
-          </a:xfrm>
-          <a:prstGeom prst="line">
-            <a:avLst/>
-          </a:prstGeom>
-          <a:ln w="12700">
-            <a:solidFill>
-              <a:srgbClr val="B4C7D2"/>
-            </a:solidFill>
-          </a:ln>
-          <a:effectLst/>
-        </p:spPr>
-      </p:cxnSp>
-      <p:sp>
-        <p:nvSpPr>
-          <p:cNvPr id="50" name="C1-E26 text 48" descr="sci-ppt:o048"/>
+              <a:t>The same fixed set of equations governs every later spatial calculation: the</a:t>
+            </a:r>
+          </a:p>
+          <a:p>
+            <a:pPr algn="l">
+              <a:spcAft>
+                <a:spcPts val="0"/>
+              </a:spcAft>
+            </a:pPr>
+            <a:r>
+              <a:rPr sz="1250" b="0" i="0">
+                <a:solidFill>
+                  <a:srgbClr val="B4C7D2"/>
+                </a:solidFill>
+                <a:latin typeface="Arial"/>
+              </a:rPr>
+              <a:t>pressure field supplies the push, the viscous term damps it, and the convective</a:t>
+            </a:r>
+          </a:p>
+          <a:p>
+            <a:pPr algn="l">
+              <a:spcAft>
+                <a:spcPts val="0"/>
+              </a:spcAft>
+            </a:pPr>
+            <a:r>
+              <a:rPr sz="1250" b="0" i="0">
+                <a:solidFill>
+                  <a:srgbClr val="B4C7D2"/>
+                </a:solidFill>
+                <a:latin typeface="Arial"/>
+              </a:rPr>
+              <a:t>part u·∇u makes the flow nonlinear.</a:t>
+            </a:r>
+          </a:p>
+        </p:txBody>
+      </p:sp>
+      <p:sp>
+        <p:nvSpPr>
+          <p:cNvPr id="25" name="C1-E26 text 23" descr="sci-ppt:o023"/>
           <p:cNvSpPr txBox="1"/>
           <p:nvPr/>
         </p:nvSpPr>
         <p:spPr>
           <a:xfrm>
-            <a:off x="4754880" y="914400"/>
+            <a:off x="4663440" y="2834640"/>
             <a:ext cx="7040880" cy="262636"/>
           </a:xfrm>
           <a:prstGeom prst="rect">
@@ -4323,770 +3967,18 @@
             <a:r>
               <a:rPr sz="1400" b="1" i="0">
                 <a:solidFill>
-                  <a:srgbClr val="8EDBD4"/>
+                  <a:srgbClr val="F2B880"/>
                 </a:solidFill>
                 <a:latin typeface="Arial"/>
               </a:rPr>
-              <a:t>Stand-off γ = h / Rₘₐₓ locates the boundary</a:t>
-            </a:r>
-          </a:p>
-        </p:txBody>
-      </p:sp>
-      <p:sp>
-        <p:nvSpPr>
-          <p:cNvPr id="51" name="C1-E26 ellipse 49" descr="sci-ppt:o049"/>
-          <p:cNvSpPr/>
-          <p:nvPr/>
-        </p:nvSpPr>
-        <p:spPr>
-          <a:xfrm>
-            <a:off x="5257800" y="4123944"/>
-            <a:ext cx="1188720" cy="1188720"/>
-          </a:xfrm>
-          <a:prstGeom prst="ellipse">
-            <a:avLst/>
-          </a:prstGeom>
-          <a:solidFill>
-            <a:srgbClr val="0C1820"/>
-          </a:solidFill>
-          <a:ln w="25400">
-            <a:solidFill>
-              <a:srgbClr val="F2B880"/>
-            </a:solidFill>
-          </a:ln>
-          <a:effectLst/>
-        </p:spPr>
-        <p:txBody>
-          <a:bodyPr rtlCol="0" anchor="ctr"/>
-          <a:lstStyle/>
-          <a:p>
-            <a:pPr algn="ctr"/>
-          </a:p>
-        </p:txBody>
-      </p:sp>
-      <p:cxnSp>
-        <p:nvCxnSpPr>
-          <p:cNvPr id="52" name="C1-E26 line 50" descr="sci-ppt:o050"/>
-          <p:cNvCxnSpPr/>
-          <p:nvPr/>
-        </p:nvCxnSpPr>
-        <p:spPr>
-          <a:xfrm>
-            <a:off x="5852160" y="4718304"/>
-            <a:ext cx="0" cy="768096"/>
-          </a:xfrm>
-          <a:prstGeom prst="line">
-            <a:avLst/>
-          </a:prstGeom>
-          <a:ln w="15240">
-            <a:solidFill>
-              <a:srgbClr val="B4C7D2"/>
-            </a:solidFill>
-            <a:prstDash val="dash"/>
-          </a:ln>
-          <a:effectLst/>
-        </p:spPr>
-      </p:cxnSp>
-      <p:cxnSp>
-        <p:nvCxnSpPr>
-          <p:cNvPr id="53" name="C1-E26 line 51" descr="sci-ppt:o051"/>
-          <p:cNvCxnSpPr/>
-          <p:nvPr/>
-        </p:nvCxnSpPr>
-        <p:spPr>
-          <a:xfrm>
-            <a:off x="6583680" y="4718304"/>
-            <a:ext cx="0" cy="768096"/>
-          </a:xfrm>
-          <a:prstGeom prst="line">
-            <a:avLst/>
-          </a:prstGeom>
-          <a:ln w="16510">
-            <a:solidFill>
-              <a:srgbClr val="B4C7D2"/>
-            </a:solidFill>
-          </a:ln>
-          <a:effectLst/>
-        </p:spPr>
-      </p:cxnSp>
-      <p:cxnSp>
-        <p:nvCxnSpPr>
-          <p:cNvPr id="54" name="C1-E26 line 52" descr="sci-ppt:o052"/>
-          <p:cNvCxnSpPr/>
-          <p:nvPr/>
-        </p:nvCxnSpPr>
-        <p:spPr>
-          <a:xfrm flipH="1">
-            <a:off x="6519672" y="4718304"/>
-            <a:ext cx="128016" cy="0"/>
-          </a:xfrm>
-          <a:prstGeom prst="line">
-            <a:avLst/>
-          </a:prstGeom>
-          <a:ln w="16510">
-            <a:solidFill>
-              <a:srgbClr val="B4C7D2"/>
-            </a:solidFill>
-          </a:ln>
-          <a:effectLst/>
-        </p:spPr>
-      </p:cxnSp>
-      <p:cxnSp>
-        <p:nvCxnSpPr>
-          <p:cNvPr id="55" name="C1-E26 line 53" descr="sci-ppt:o053"/>
-          <p:cNvCxnSpPr/>
-          <p:nvPr/>
-        </p:nvCxnSpPr>
-        <p:spPr>
-          <a:xfrm flipH="1">
-            <a:off x="6519672" y="5486400"/>
-            <a:ext cx="128016" cy="0"/>
-          </a:xfrm>
-          <a:prstGeom prst="line">
-            <a:avLst/>
-          </a:prstGeom>
-          <a:ln w="16510">
-            <a:solidFill>
-              <a:srgbClr val="B4C7D2"/>
-            </a:solidFill>
-          </a:ln>
-          <a:effectLst/>
-        </p:spPr>
-      </p:cxnSp>
-      <p:sp>
-        <p:nvSpPr>
-          <p:cNvPr id="56" name="C1-E26 text 54" descr="sci-ppt:o054"/>
-          <p:cNvSpPr txBox="1"/>
-          <p:nvPr/>
-        </p:nvSpPr>
-        <p:spPr>
-          <a:xfrm>
-            <a:off x="5486400" y="5018532"/>
-            <a:ext cx="1828800" cy="216153"/>
-          </a:xfrm>
-          <a:prstGeom prst="rect">
-            <a:avLst/>
-          </a:prstGeom>
-          <a:noFill/>
-          <a:effectLst/>
-        </p:spPr>
-        <p:txBody>
-          <a:bodyPr wrap="none" lIns="18288" rIns="18288" tIns="18288" bIns="18288" anchor="t">
-            <a:spAutoFit/>
-          </a:bodyPr>
-          <a:lstStyle/>
-          <a:p>
-            <a:pPr algn="ctr">
-              <a:spcAft>
-                <a:spcPts val="0"/>
-              </a:spcAft>
-            </a:pPr>
-          </a:p>
-        </p:txBody>
-      </p:sp>
-      <p:sp>
-        <p:nvSpPr>
-          <p:cNvPr id="57" name="C1-E26 text 55" descr="sci-ppt:o055"/>
-          <p:cNvSpPr txBox="1"/>
-          <p:nvPr/>
-        </p:nvSpPr>
-        <p:spPr>
-          <a:xfrm>
-            <a:off x="6693408" y="5010912"/>
-            <a:ext cx="1371600" cy="216153"/>
-          </a:xfrm>
-          <a:prstGeom prst="rect">
-            <a:avLst/>
-          </a:prstGeom>
-          <a:noFill/>
-          <a:effectLst/>
-        </p:spPr>
-        <p:txBody>
-          <a:bodyPr wrap="none" lIns="18288" rIns="18288" tIns="18288" bIns="18288" anchor="t">
-            <a:spAutoFit/>
-          </a:bodyPr>
-          <a:lstStyle/>
-          <a:p>
-            <a:pPr algn="l">
-              <a:spcAft>
-                <a:spcPts val="0"/>
-              </a:spcAft>
-            </a:pPr>
-            <a:r>
-              <a:rPr sz="1100" b="0" i="0">
-                <a:solidFill>
-                  <a:srgbClr val="B4C7D2"/>
-                </a:solidFill>
-                <a:latin typeface="Arial"/>
-              </a:rPr>
-              <a:t>h = 0.6 Rₘₐₓ</a:t>
-            </a:r>
-          </a:p>
-        </p:txBody>
-      </p:sp>
-      <p:sp>
-        <p:nvSpPr>
-          <p:cNvPr id="58" name="C1-E26 text 56" descr="sci-ppt:o056"/>
-          <p:cNvSpPr txBox="1"/>
-          <p:nvPr/>
-        </p:nvSpPr>
-        <p:spPr>
-          <a:xfrm>
-            <a:off x="5120640" y="3712463"/>
-            <a:ext cx="1463040" cy="254889"/>
-          </a:xfrm>
-          <a:prstGeom prst="rect">
-            <a:avLst/>
-          </a:prstGeom>
-          <a:noFill/>
-          <a:effectLst/>
-        </p:spPr>
-        <p:txBody>
-          <a:bodyPr wrap="none" lIns="18288" rIns="18288" tIns="18288" bIns="18288" anchor="t">
-            <a:spAutoFit/>
-          </a:bodyPr>
-          <a:lstStyle/>
-          <a:p>
-            <a:pPr algn="ctr">
-              <a:spcAft>
-                <a:spcPts val="0"/>
-              </a:spcAft>
-            </a:pPr>
-            <a:r>
-              <a:rPr sz="1350" b="1" i="0">
-                <a:solidFill>
-                  <a:srgbClr val="8EDBD4"/>
-                </a:solidFill>
-                <a:latin typeface="Arial"/>
-              </a:rPr>
-              <a:t>γ = 0.6</a:t>
-            </a:r>
-          </a:p>
-        </p:txBody>
-      </p:sp>
-      <p:sp>
-        <p:nvSpPr>
-          <p:cNvPr id="59" name="C1-E26 ellipse 57" descr="sci-ppt:o057"/>
-          <p:cNvSpPr/>
-          <p:nvPr/>
-        </p:nvSpPr>
-        <p:spPr>
-          <a:xfrm>
-            <a:off x="7694675" y="3568903"/>
-            <a:ext cx="1069848" cy="1069848"/>
-          </a:xfrm>
-          <a:prstGeom prst="ellipse">
-            <a:avLst/>
-          </a:prstGeom>
-          <a:solidFill>
-            <a:srgbClr val="0C1820"/>
-          </a:solidFill>
-          <a:ln w="25400">
-            <a:solidFill>
-              <a:srgbClr val="F2B880"/>
-            </a:solidFill>
-          </a:ln>
-          <a:effectLst/>
-        </p:spPr>
-        <p:txBody>
-          <a:bodyPr rtlCol="0" anchor="ctr"/>
-          <a:lstStyle/>
-          <a:p>
-            <a:pPr algn="ctr"/>
-          </a:p>
-        </p:txBody>
-      </p:sp>
-      <p:cxnSp>
-        <p:nvCxnSpPr>
-          <p:cNvPr id="60" name="C1-E26 line 58" descr="sci-ppt:o058"/>
-          <p:cNvCxnSpPr/>
-          <p:nvPr/>
-        </p:nvCxnSpPr>
-        <p:spPr>
-          <a:xfrm>
-            <a:off x="8229600" y="4103827"/>
-            <a:ext cx="0" cy="1382573"/>
-          </a:xfrm>
-          <a:prstGeom prst="line">
-            <a:avLst/>
-          </a:prstGeom>
-          <a:ln w="15240">
-            <a:solidFill>
-              <a:srgbClr val="B4C7D2"/>
-            </a:solidFill>
-            <a:prstDash val="dash"/>
-          </a:ln>
-          <a:effectLst/>
-        </p:spPr>
-      </p:cxnSp>
-      <p:cxnSp>
-        <p:nvCxnSpPr>
-          <p:cNvPr id="61" name="C1-E26 line 59" descr="sci-ppt:o059"/>
-          <p:cNvCxnSpPr/>
-          <p:nvPr/>
-        </p:nvCxnSpPr>
-        <p:spPr>
-          <a:xfrm>
-            <a:off x="8887968" y="4103827"/>
-            <a:ext cx="0" cy="1382573"/>
-          </a:xfrm>
-          <a:prstGeom prst="line">
-            <a:avLst/>
-          </a:prstGeom>
-          <a:ln w="16510">
-            <a:solidFill>
-              <a:srgbClr val="B4C7D2"/>
-            </a:solidFill>
-          </a:ln>
-          <a:effectLst/>
-        </p:spPr>
-      </p:cxnSp>
-      <p:cxnSp>
-        <p:nvCxnSpPr>
-          <p:cNvPr id="62" name="C1-E26 line 60" descr="sci-ppt:o060"/>
-          <p:cNvCxnSpPr/>
-          <p:nvPr/>
-        </p:nvCxnSpPr>
-        <p:spPr>
-          <a:xfrm flipH="1">
-            <a:off x="8823960" y="4103827"/>
-            <a:ext cx="128016" cy="0"/>
-          </a:xfrm>
-          <a:prstGeom prst="line">
-            <a:avLst/>
-          </a:prstGeom>
-          <a:ln w="16510">
-            <a:solidFill>
-              <a:srgbClr val="B4C7D2"/>
-            </a:solidFill>
-          </a:ln>
-          <a:effectLst/>
-        </p:spPr>
-      </p:cxnSp>
-      <p:cxnSp>
-        <p:nvCxnSpPr>
-          <p:cNvPr id="63" name="C1-E26 line 61" descr="sci-ppt:o061"/>
-          <p:cNvCxnSpPr/>
-          <p:nvPr/>
-        </p:nvCxnSpPr>
-        <p:spPr>
-          <a:xfrm flipH="1">
-            <a:off x="8823960" y="5486400"/>
-            <a:ext cx="128016" cy="0"/>
-          </a:xfrm>
-          <a:prstGeom prst="line">
-            <a:avLst/>
-          </a:prstGeom>
-          <a:ln w="16510">
-            <a:solidFill>
-              <a:srgbClr val="B4C7D2"/>
-            </a:solidFill>
-          </a:ln>
-          <a:effectLst/>
-        </p:spPr>
-      </p:cxnSp>
-      <p:sp>
-        <p:nvSpPr>
-          <p:cNvPr id="64" name="C1-E26 text 62" descr="sci-ppt:o062"/>
-          <p:cNvSpPr txBox="1"/>
-          <p:nvPr/>
-        </p:nvSpPr>
-        <p:spPr>
-          <a:xfrm>
-            <a:off x="7790688" y="4711293"/>
-            <a:ext cx="1828800" cy="216153"/>
-          </a:xfrm>
-          <a:prstGeom prst="rect">
-            <a:avLst/>
-          </a:prstGeom>
-          <a:noFill/>
-          <a:effectLst/>
-        </p:spPr>
-        <p:txBody>
-          <a:bodyPr wrap="none" lIns="18288" rIns="18288" tIns="18288" bIns="18288" anchor="t">
-            <a:spAutoFit/>
-          </a:bodyPr>
-          <a:lstStyle/>
-          <a:p>
-            <a:pPr algn="ctr">
-              <a:spcAft>
-                <a:spcPts val="0"/>
-              </a:spcAft>
-            </a:pPr>
-          </a:p>
-        </p:txBody>
-      </p:sp>
-      <p:sp>
-        <p:nvSpPr>
-          <p:cNvPr id="65" name="C1-E26 text 63" descr="sci-ppt:o063"/>
-          <p:cNvSpPr txBox="1"/>
-          <p:nvPr/>
-        </p:nvSpPr>
-        <p:spPr>
-          <a:xfrm>
-            <a:off x="8997696" y="4703673"/>
-            <a:ext cx="1371600" cy="216153"/>
-          </a:xfrm>
-          <a:prstGeom prst="rect">
-            <a:avLst/>
-          </a:prstGeom>
-          <a:noFill/>
-          <a:effectLst/>
-        </p:spPr>
-        <p:txBody>
-          <a:bodyPr wrap="none" lIns="18288" rIns="18288" tIns="18288" bIns="18288" anchor="t">
-            <a:spAutoFit/>
-          </a:bodyPr>
-          <a:lstStyle/>
-          <a:p>
-            <a:pPr algn="l">
-              <a:spcAft>
-                <a:spcPts val="0"/>
-              </a:spcAft>
-            </a:pPr>
-            <a:r>
-              <a:rPr sz="1100" b="0" i="0">
-                <a:solidFill>
-                  <a:srgbClr val="B4C7D2"/>
-                </a:solidFill>
-                <a:latin typeface="Arial"/>
-              </a:rPr>
-              <a:t>h = 1.2 Rₘₐₓ</a:t>
-            </a:r>
-          </a:p>
-        </p:txBody>
-      </p:sp>
-      <p:sp>
-        <p:nvSpPr>
-          <p:cNvPr id="66" name="C1-E26 text 64" descr="sci-ppt:o064"/>
-          <p:cNvSpPr txBox="1"/>
-          <p:nvPr/>
-        </p:nvSpPr>
-        <p:spPr>
-          <a:xfrm>
-            <a:off x="7498079" y="3157423"/>
-            <a:ext cx="1463040" cy="254889"/>
-          </a:xfrm>
-          <a:prstGeom prst="rect">
-            <a:avLst/>
-          </a:prstGeom>
-          <a:noFill/>
-          <a:effectLst/>
-        </p:spPr>
-        <p:txBody>
-          <a:bodyPr wrap="none" lIns="18288" rIns="18288" tIns="18288" bIns="18288" anchor="t">
-            <a:spAutoFit/>
-          </a:bodyPr>
-          <a:lstStyle/>
-          <a:p>
-            <a:pPr algn="ctr">
-              <a:spcAft>
-                <a:spcPts val="0"/>
-              </a:spcAft>
-            </a:pPr>
-            <a:r>
-              <a:rPr sz="1350" b="1" i="0">
-                <a:solidFill>
-                  <a:srgbClr val="8EDBD4"/>
-                </a:solidFill>
-                <a:latin typeface="Arial"/>
-              </a:rPr>
-              <a:t>γ = 1.2</a:t>
-            </a:r>
-          </a:p>
-        </p:txBody>
-      </p:sp>
-      <p:sp>
-        <p:nvSpPr>
-          <p:cNvPr id="67" name="C1-E26 ellipse 65" descr="sci-ppt:o065"/>
-          <p:cNvSpPr/>
-          <p:nvPr/>
-        </p:nvSpPr>
-        <p:spPr>
-          <a:xfrm>
-            <a:off x="10252709" y="2544318"/>
-            <a:ext cx="891540" cy="891540"/>
-          </a:xfrm>
-          <a:prstGeom prst="ellipse">
-            <a:avLst/>
-          </a:prstGeom>
-          <a:solidFill>
-            <a:srgbClr val="0C1820"/>
-          </a:solidFill>
-          <a:ln w="25400">
-            <a:solidFill>
-              <a:srgbClr val="F2B880"/>
-            </a:solidFill>
-          </a:ln>
-          <a:effectLst/>
-        </p:spPr>
-        <p:txBody>
-          <a:bodyPr rtlCol="0" anchor="ctr"/>
-          <a:lstStyle/>
-          <a:p>
-            <a:pPr algn="ctr"/>
-          </a:p>
-        </p:txBody>
-      </p:sp>
-      <p:cxnSp>
-        <p:nvCxnSpPr>
-          <p:cNvPr id="68" name="C1-E26 line 66" descr="sci-ppt:o066"/>
-          <p:cNvCxnSpPr/>
-          <p:nvPr/>
-        </p:nvCxnSpPr>
-        <p:spPr>
-          <a:xfrm>
-            <a:off x="10698480" y="2990088"/>
-            <a:ext cx="0" cy="2496312"/>
-          </a:xfrm>
-          <a:prstGeom prst="line">
-            <a:avLst/>
-          </a:prstGeom>
-          <a:ln w="15240">
-            <a:solidFill>
-              <a:srgbClr val="B4C7D2"/>
-            </a:solidFill>
-            <a:prstDash val="dash"/>
-          </a:ln>
-          <a:effectLst/>
-        </p:spPr>
-      </p:cxnSp>
-      <p:cxnSp>
-        <p:nvCxnSpPr>
-          <p:cNvPr id="69" name="C1-E26 line 67" descr="sci-ppt:o067"/>
-          <p:cNvCxnSpPr/>
-          <p:nvPr/>
-        </p:nvCxnSpPr>
-        <p:spPr>
-          <a:xfrm>
-            <a:off x="11247119" y="2990088"/>
-            <a:ext cx="0" cy="2496312"/>
-          </a:xfrm>
-          <a:prstGeom prst="line">
-            <a:avLst/>
-          </a:prstGeom>
-          <a:ln w="16510">
-            <a:solidFill>
-              <a:srgbClr val="B4C7D2"/>
-            </a:solidFill>
-          </a:ln>
-          <a:effectLst/>
-        </p:spPr>
-      </p:cxnSp>
-      <p:cxnSp>
-        <p:nvCxnSpPr>
-          <p:cNvPr id="70" name="C1-E26 line 68" descr="sci-ppt:o068"/>
-          <p:cNvCxnSpPr/>
-          <p:nvPr/>
-        </p:nvCxnSpPr>
-        <p:spPr>
-          <a:xfrm flipH="1">
-            <a:off x="11183111" y="2990088"/>
-            <a:ext cx="128017" cy="0"/>
-          </a:xfrm>
-          <a:prstGeom prst="line">
-            <a:avLst/>
-          </a:prstGeom>
-          <a:ln w="16510">
-            <a:solidFill>
-              <a:srgbClr val="B4C7D2"/>
-            </a:solidFill>
-          </a:ln>
-          <a:effectLst/>
-        </p:spPr>
-      </p:cxnSp>
-      <p:cxnSp>
-        <p:nvCxnSpPr>
-          <p:cNvPr id="71" name="C1-E26 line 69" descr="sci-ppt:o069"/>
-          <p:cNvCxnSpPr/>
-          <p:nvPr/>
-        </p:nvCxnSpPr>
-        <p:spPr>
-          <a:xfrm flipH="1">
-            <a:off x="11183111" y="5486400"/>
-            <a:ext cx="128017" cy="0"/>
-          </a:xfrm>
-          <a:prstGeom prst="line">
-            <a:avLst/>
-          </a:prstGeom>
-          <a:ln w="16510">
-            <a:solidFill>
-              <a:srgbClr val="B4C7D2"/>
-            </a:solidFill>
-          </a:ln>
-          <a:effectLst/>
-        </p:spPr>
-      </p:cxnSp>
-      <p:sp>
-        <p:nvSpPr>
-          <p:cNvPr id="72" name="C1-E26 text 70" descr="sci-ppt:o070"/>
-          <p:cNvSpPr txBox="1"/>
-          <p:nvPr/>
-        </p:nvSpPr>
-        <p:spPr>
-          <a:xfrm>
-            <a:off x="10149840" y="4154423"/>
-            <a:ext cx="1828800" cy="216153"/>
-          </a:xfrm>
-          <a:prstGeom prst="rect">
-            <a:avLst/>
-          </a:prstGeom>
-          <a:noFill/>
-          <a:effectLst/>
-        </p:spPr>
-        <p:txBody>
-          <a:bodyPr wrap="none" lIns="18288" rIns="18288" tIns="18288" bIns="18288" anchor="t">
-            <a:spAutoFit/>
-          </a:bodyPr>
-          <a:lstStyle/>
-          <a:p>
-            <a:pPr algn="ctr">
-              <a:spcAft>
-                <a:spcPts val="0"/>
-              </a:spcAft>
-            </a:pPr>
-          </a:p>
-        </p:txBody>
-      </p:sp>
-      <p:sp>
-        <p:nvSpPr>
-          <p:cNvPr id="73" name="C1-E26 text 71" descr="sci-ppt:o071"/>
-          <p:cNvSpPr txBox="1"/>
-          <p:nvPr/>
-        </p:nvSpPr>
-        <p:spPr>
-          <a:xfrm>
-            <a:off x="11356847" y="4146804"/>
-            <a:ext cx="1371600" cy="216153"/>
-          </a:xfrm>
-          <a:prstGeom prst="rect">
-            <a:avLst/>
-          </a:prstGeom>
-          <a:noFill/>
-          <a:effectLst/>
-        </p:spPr>
-        <p:txBody>
-          <a:bodyPr wrap="none" lIns="18288" rIns="18288" tIns="18288" bIns="18288" anchor="t">
-            <a:spAutoFit/>
-          </a:bodyPr>
-          <a:lstStyle/>
-          <a:p>
-            <a:pPr algn="l">
-              <a:spcAft>
-                <a:spcPts val="0"/>
-              </a:spcAft>
-            </a:pPr>
-            <a:r>
-              <a:rPr sz="1100" b="0" i="0">
-                <a:solidFill>
-                  <a:srgbClr val="B4C7D2"/>
-                </a:solidFill>
-                <a:latin typeface="Arial"/>
-              </a:rPr>
-              <a:t>h = 2.6 Rₘₐₓ</a:t>
-            </a:r>
-          </a:p>
-        </p:txBody>
-      </p:sp>
-      <p:sp>
-        <p:nvSpPr>
-          <p:cNvPr id="74" name="C1-E26 text 72" descr="sci-ppt:o072"/>
-          <p:cNvSpPr txBox="1"/>
-          <p:nvPr/>
-        </p:nvSpPr>
-        <p:spPr>
-          <a:xfrm>
-            <a:off x="9966959" y="2132837"/>
-            <a:ext cx="1463040" cy="254889"/>
-          </a:xfrm>
-          <a:prstGeom prst="rect">
-            <a:avLst/>
-          </a:prstGeom>
-          <a:noFill/>
-          <a:effectLst/>
-        </p:spPr>
-        <p:txBody>
-          <a:bodyPr wrap="none" lIns="18288" rIns="18288" tIns="18288" bIns="18288" anchor="t">
-            <a:spAutoFit/>
-          </a:bodyPr>
-          <a:lstStyle/>
-          <a:p>
-            <a:pPr algn="ctr">
-              <a:spcAft>
-                <a:spcPts val="0"/>
-              </a:spcAft>
-            </a:pPr>
-            <a:r>
-              <a:rPr sz="1350" b="1" i="0">
-                <a:solidFill>
-                  <a:srgbClr val="8EDBD4"/>
-                </a:solidFill>
-                <a:latin typeface="Arial"/>
-              </a:rPr>
-              <a:t>γ = 2.6</a:t>
-            </a:r>
-          </a:p>
-        </p:txBody>
-      </p:sp>
-      <p:sp>
-        <p:nvSpPr>
-          <p:cNvPr id="75" name="C1-E26 text 73" descr="sci-ppt:o073"/>
-          <p:cNvSpPr txBox="1"/>
-          <p:nvPr/>
-        </p:nvSpPr>
-        <p:spPr>
-          <a:xfrm>
-            <a:off x="4754880" y="1371600"/>
-            <a:ext cx="7040880" cy="433070"/>
-          </a:xfrm>
-          <a:prstGeom prst="rect">
-            <a:avLst/>
-          </a:prstGeom>
-          <a:noFill/>
-          <a:effectLst/>
-        </p:spPr>
-        <p:txBody>
-          <a:bodyPr wrap="none" lIns="18288" rIns="18288" tIns="18288" bIns="18288" anchor="t">
-            <a:spAutoFit/>
-          </a:bodyPr>
-          <a:lstStyle/>
-          <a:p>
-            <a:pPr algn="l">
-              <a:spcAft>
-                <a:spcPts val="0"/>
-              </a:spcAft>
-            </a:pPr>
-            <a:r>
-              <a:rPr sz="1250" b="0" i="0">
-                <a:solidFill>
-                  <a:srgbClr val="E7F0F3"/>
-                </a:solidFill>
-                <a:latin typeface="Arial"/>
-              </a:rPr>
-              <a:t>Small γ: boundary close, strong asymmetry.   Large γ: far boundary, nearly</a:t>
-            </a:r>
-          </a:p>
-          <a:p>
-            <a:pPr algn="l">
-              <a:spcAft>
-                <a:spcPts val="0"/>
-              </a:spcAft>
-            </a:pPr>
-            <a:r>
-              <a:rPr sz="1250" b="0" i="0">
-                <a:solidFill>
-                  <a:srgbClr val="E7F0F3"/>
-                </a:solidFill>
-                <a:latin typeface="Arial"/>
-              </a:rPr>
-              <a:t>spherical.</a:t>
-            </a:r>
-          </a:p>
-        </p:txBody>
-      </p:sp>
-      <p:sp>
-        <p:nvSpPr>
-          <p:cNvPr id="76" name="C1-E26 text 74" descr="sci-ppt:o074"/>
+              <a:t>Du/Dt = ∂u/∂t + (u·∇)u</a:t>
+            </a:r>
+          </a:p>
+        </p:txBody>
+      </p:sp>
+      <p:sp>
+        <p:nvSpPr>
+          <p:cNvPr id="26" name="C1-E26 text 24" descr="sci-ppt:o024"/>
           <p:cNvSpPr txBox="1"/>
           <p:nvPr/>
         </p:nvSpPr>
@@ -5119,7 +4011,7 @@
                 </a:solidFill>
                 <a:latin typeface="Arial"/>
               </a:rPr>
-              <a:t>Definitions of Eq. C1-E26. Positions drawn to show the trend; radii are not to scale.</a:t>
+              <a:t>Vectors are schematic; constant ρ and μ.</a:t>
             </a:r>
           </a:p>
         </p:txBody>
